--- a/天童中部小学校視察/081019_天童中部小学校_指導主事研修スライド_写真追加版.pptx
+++ b/天童中部小学校視察/081019_天童中部小学校_指導主事研修スライド_写真追加版.pptx
@@ -1874,7 +1874,7 @@
           </a:p>
           <a:p>
             <a:r>
-              <a:t>また、「自分でくらしをつくる」取組として、校内に買い物学習施設「サンピュア」があります。商品選択から会計、ごみ分別、清掃までを体験し、判断し、行動し、後始末をするところまでを学習として位置付けていました。</a:t>
+              <a:t>（情報提供として、必要に応じて）なお、同校には「自分でくらしをつくる」取組として、校内に買い物学習施設「サンピュア」もあります。</a:t>
             </a:r>
           </a:p>
         </p:txBody>
@@ -3884,6 +3884,917 @@
 
 <file path=ppt/slides/slide10.xml><?xml version="1.0" encoding="utf-8"?>
 <p:sld xmlns:a="http://schemas.openxmlformats.org/drawingml/2006/main" xmlns:r="http://schemas.openxmlformats.org/officeDocument/2006/relationships" xmlns:p="http://schemas.openxmlformats.org/presentationml/2006/main">
+  <p:cSld name="Slide 6">
+    <p:spTree>
+      <p:nvGrpSpPr>
+        <p:cNvPr id="1" name=""/>
+        <p:cNvGrpSpPr/>
+        <p:nvPr/>
+      </p:nvGrpSpPr>
+      <p:grpSpPr>
+        <a:xfrm>
+          <a:off x="0" y="0"/>
+          <a:ext cx="0" cy="0"/>
+          <a:chOff x="0" y="0"/>
+          <a:chExt cx="0" cy="0"/>
+        </a:xfrm>
+      </p:grpSpPr>
+      <p:sp>
+        <p:nvSpPr>
+          <p:cNvPr id="2" name="Text 0"/>
+          <p:cNvSpPr>
+            <a:spLocks noGrp="1"/>
+          </p:cNvSpPr>
+          <p:nvPr>
+            <p:ph type="body" idx="100" hasCustomPrompt="1"/>
+          </p:nvPr>
+        </p:nvSpPr>
+        <p:spPr>
+          <a:xfrm>
+            <a:off x="548640" y="320040"/>
+            <a:ext cx="11094415" cy="320040"/>
+          </a:xfrm>
+          <a:prstGeom prst="rect">
+            <a:avLst/>
+          </a:prstGeom>
+          <a:noFill/>
+          <a:ln/>
+        </p:spPr>
+        <p:txBody>
+          <a:bodyPr wrap="square" lIns="0" tIns="0" rIns="0" bIns="0" rtlCol="0" anchor="ctr"/>
+          <a:lstStyle/>
+          <a:p>
+            <a:pPr marL="0" indent="0">
+              <a:buNone/>
+            </a:pPr>
+            <a:r>
+              <a:rPr lang="en-US" sz="1300" b="1" dirty="0">
+                <a:solidFill>
+                  <a:schemeClr val="accent2"/>
+                </a:solidFill>
+              </a:rPr>
+              <a:t>01　天童中部小学校の取組</a:t>
+            </a:r>
+            <a:endParaRPr lang="en-US" sz="1300" dirty="0"/>
+          </a:p>
+        </p:txBody>
+      </p:sp>
+      <p:sp>
+        <p:nvSpPr>
+          <p:cNvPr id="3" name="Text 0"/>
+          <p:cNvSpPr>
+            <a:spLocks noGrp="1"/>
+          </p:cNvSpPr>
+          <p:nvPr>
+            <p:ph type="title" idx="101" hasCustomPrompt="1"/>
+          </p:nvPr>
+        </p:nvSpPr>
+        <p:spPr>
+          <a:xfrm>
+            <a:off x="548640" y="658368"/>
+            <a:ext cx="11094415" cy="685800"/>
+          </a:xfrm>
+          <a:prstGeom prst="rect">
+            <a:avLst/>
+          </a:prstGeom>
+          <a:noFill/>
+          <a:ln/>
+        </p:spPr>
+        <p:txBody>
+          <a:bodyPr wrap="square" lIns="0" tIns="0" rIns="0" bIns="0" rtlCol="0" anchor="ctr"/>
+          <a:lstStyle/>
+          <a:p>
+            <a:pPr marL="0" indent="0" algn="l">
+              <a:buNone/>
+            </a:pPr>
+            <a:r>
+              <a:rPr lang="en-US" sz="3000" b="1" dirty="0">
+                <a:solidFill>
+                  <a:schemeClr val="tx2"/>
+                </a:solidFill>
+              </a:rPr>
+              <a:t>マイプラン学習（MP学習）</a:t>
+            </a:r>
+            <a:endParaRPr lang="en-US" sz="3000" dirty="0"/>
+          </a:p>
+        </p:txBody>
+      </p:sp>
+      <p:sp>
+        <p:nvSpPr>
+          <p:cNvPr id="5" name="Text 3"/>
+          <p:cNvSpPr txBox="1"/>
+          <p:nvPr/>
+        </p:nvSpPr>
+        <p:spPr>
+          <a:xfrm>
+            <a:off x="548640" y="1508760"/>
+            <a:ext cx="6949440" cy="320040"/>
+          </a:xfrm>
+          <a:prstGeom prst="rect">
+            <a:avLst/>
+          </a:prstGeom>
+          <a:noFill/>
+          <a:ln/>
+        </p:spPr>
+        <p:txBody>
+          <a:bodyPr wrap="square" lIns="0" tIns="0" rIns="0" bIns="0" rtlCol="0" anchor="ctr"/>
+          <a:lstStyle/>
+          <a:p>
+            <a:pPr marL="0" indent="0">
+              <a:buNone/>
+            </a:pPr>
+            <a:r>
+              <a:rPr lang="en-US" sz="1400" dirty="0">
+                <a:solidFill>
+                  <a:schemeClr val="accent5"/>
+                </a:solidFill>
+              </a:rPr>
+              <a:t>単に進度を自由にする学習ではなく ――</a:t>
+            </a:r>
+            <a:endParaRPr lang="en-US" sz="1400" dirty="0"/>
+          </a:p>
+        </p:txBody>
+      </p:sp>
+      <p:sp>
+        <p:nvSpPr>
+          <p:cNvPr id="6" name="Shape 4"/>
+          <p:cNvSpPr/>
+          <p:nvPr/>
+        </p:nvSpPr>
+        <p:spPr>
+          <a:xfrm>
+            <a:off x="548640" y="1874520"/>
+            <a:ext cx="6949440" cy="777240"/>
+          </a:xfrm>
+          <a:prstGeom prst="roundRect">
+            <a:avLst>
+              <a:gd name="adj" fmla="val 9412"/>
+            </a:avLst>
+          </a:prstGeom>
+          <a:solidFill>
+            <a:schemeClr val="tx2"/>
+          </a:solidFill>
+          <a:ln/>
+        </p:spPr>
+        <p:txBody>
+          <a:bodyPr/>
+          <a:lstStyle/>
+          <a:p>
+            <a:endParaRPr lang="ja-JP" altLang="en-US"/>
+          </a:p>
+        </p:txBody>
+      </p:sp>
+      <p:sp>
+        <p:nvSpPr>
+          <p:cNvPr id="7" name="Text 5"/>
+          <p:cNvSpPr txBox="1"/>
+          <p:nvPr/>
+        </p:nvSpPr>
+        <p:spPr>
+          <a:xfrm>
+            <a:off x="777240" y="1874520"/>
+            <a:ext cx="6492240" cy="777240"/>
+          </a:xfrm>
+          <a:prstGeom prst="rect">
+            <a:avLst/>
+          </a:prstGeom>
+          <a:noFill/>
+          <a:ln/>
+        </p:spPr>
+        <p:txBody>
+          <a:bodyPr wrap="square" lIns="0" tIns="0" rIns="0" bIns="0" rtlCol="0" anchor="ctr"/>
+          <a:lstStyle/>
+          <a:p>
+            <a:pPr marL="0" indent="0" algn="ctr">
+              <a:buNone/>
+            </a:pPr>
+            <a:r>
+              <a:rPr lang="en-US" sz="1700" b="1" dirty="0">
+                <a:solidFill>
+                  <a:schemeClr val="bg1"/>
+                </a:solidFill>
+              </a:rPr>
+              <a:t>学習のゴールに向かって、自分で計画を立て、</a:t>
+            </a:r>
+            <a:endParaRPr lang="en-US" sz="1700" dirty="0"/>
+          </a:p>
+          <a:p>
+            <a:pPr marL="0" indent="0" algn="ctr">
+              <a:buNone/>
+            </a:pPr>
+            <a:r>
+              <a:rPr lang="en-US" sz="1700" b="1" dirty="0">
+                <a:solidFill>
+                  <a:schemeClr val="bg1"/>
+                </a:solidFill>
+              </a:rPr>
+              <a:t>調整しながら学ぶ学習</a:t>
+            </a:r>
+            <a:endParaRPr lang="en-US" sz="1700" dirty="0"/>
+          </a:p>
+        </p:txBody>
+      </p:sp>
+      <p:sp>
+        <p:nvSpPr>
+          <p:cNvPr id="8" name="Shape 6"/>
+          <p:cNvSpPr/>
+          <p:nvPr/>
+        </p:nvSpPr>
+        <p:spPr>
+          <a:xfrm>
+            <a:off x="548640" y="2834640"/>
+            <a:ext cx="1463040" cy="640080"/>
+          </a:xfrm>
+          <a:prstGeom prst="roundRect">
+            <a:avLst>
+              <a:gd name="adj" fmla="val 11429"/>
+            </a:avLst>
+          </a:prstGeom>
+          <a:solidFill>
+            <a:schemeClr val="bg2"/>
+          </a:solidFill>
+          <a:ln/>
+        </p:spPr>
+        <p:txBody>
+          <a:bodyPr/>
+          <a:lstStyle/>
+          <a:p>
+            <a:endParaRPr lang="ja-JP" altLang="en-US"/>
+          </a:p>
+        </p:txBody>
+      </p:sp>
+      <p:sp>
+        <p:nvSpPr>
+          <p:cNvPr id="9" name="Text 7"/>
+          <p:cNvSpPr txBox="1"/>
+          <p:nvPr/>
+        </p:nvSpPr>
+        <p:spPr>
+          <a:xfrm>
+            <a:off x="548640" y="2834640"/>
+            <a:ext cx="1463040" cy="640080"/>
+          </a:xfrm>
+          <a:prstGeom prst="rect">
+            <a:avLst/>
+          </a:prstGeom>
+          <a:noFill/>
+          <a:ln/>
+        </p:spPr>
+        <p:txBody>
+          <a:bodyPr wrap="square" lIns="0" tIns="0" rIns="0" bIns="0" rtlCol="0" anchor="ctr"/>
+          <a:lstStyle/>
+          <a:p>
+            <a:pPr marL="0" indent="0" algn="ctr">
+              <a:buNone/>
+            </a:pPr>
+            <a:r>
+              <a:rPr lang="en-US" sz="1700" b="1" dirty="0">
+                <a:solidFill>
+                  <a:schemeClr val="tx2"/>
+                </a:solidFill>
+              </a:rPr>
+              <a:t>計画する</a:t>
+            </a:r>
+            <a:endParaRPr lang="en-US" sz="1700" dirty="0"/>
+          </a:p>
+        </p:txBody>
+      </p:sp>
+      <p:pic>
+        <p:nvPicPr>
+          <p:cNvPr id="10" name="Image 0" descr="preencoded.png"/>
+          <p:cNvPicPr>
+            <a:picLocks noChangeAspect="1"/>
+          </p:cNvPicPr>
+          <p:nvPr/>
+        </p:nvPicPr>
+        <p:blipFill>
+          <a:blip r:embed="rId3"/>
+          <a:stretch>
+            <a:fillRect/>
+          </a:stretch>
+        </p:blipFill>
+        <p:spPr>
+          <a:xfrm>
+            <a:off x="2075688" y="3035808"/>
+            <a:ext cx="237744" cy="237744"/>
+          </a:xfrm>
+          <a:prstGeom prst="rect">
+            <a:avLst/>
+          </a:prstGeom>
+        </p:spPr>
+      </p:pic>
+      <p:sp>
+        <p:nvSpPr>
+          <p:cNvPr id="11" name="Shape 8"/>
+          <p:cNvSpPr/>
+          <p:nvPr/>
+        </p:nvSpPr>
+        <p:spPr>
+          <a:xfrm>
+            <a:off x="2377440" y="2834640"/>
+            <a:ext cx="1463040" cy="640080"/>
+          </a:xfrm>
+          <a:prstGeom prst="roundRect">
+            <a:avLst>
+              <a:gd name="adj" fmla="val 11429"/>
+            </a:avLst>
+          </a:prstGeom>
+          <a:solidFill>
+            <a:schemeClr val="bg2"/>
+          </a:solidFill>
+          <a:ln/>
+        </p:spPr>
+        <p:txBody>
+          <a:bodyPr/>
+          <a:lstStyle/>
+          <a:p>
+            <a:endParaRPr lang="ja-JP" altLang="en-US"/>
+          </a:p>
+        </p:txBody>
+      </p:sp>
+      <p:sp>
+        <p:nvSpPr>
+          <p:cNvPr id="12" name="Text 9"/>
+          <p:cNvSpPr txBox="1"/>
+          <p:nvPr/>
+        </p:nvSpPr>
+        <p:spPr>
+          <a:xfrm>
+            <a:off x="2377440" y="2834640"/>
+            <a:ext cx="1463040" cy="640080"/>
+          </a:xfrm>
+          <a:prstGeom prst="rect">
+            <a:avLst/>
+          </a:prstGeom>
+          <a:noFill/>
+          <a:ln/>
+        </p:spPr>
+        <p:txBody>
+          <a:bodyPr wrap="square" lIns="0" tIns="0" rIns="0" bIns="0" rtlCol="0" anchor="ctr"/>
+          <a:lstStyle/>
+          <a:p>
+            <a:pPr marL="0" indent="0" algn="ctr">
+              <a:buNone/>
+            </a:pPr>
+            <a:r>
+              <a:rPr lang="en-US" sz="1700" b="1" dirty="0">
+                <a:solidFill>
+                  <a:schemeClr val="tx2"/>
+                </a:solidFill>
+              </a:rPr>
+              <a:t>学ぶ</a:t>
+            </a:r>
+            <a:endParaRPr lang="en-US" sz="1700" dirty="0"/>
+          </a:p>
+        </p:txBody>
+      </p:sp>
+      <p:pic>
+        <p:nvPicPr>
+          <p:cNvPr id="13" name="Image 1" descr="preencoded.png"/>
+          <p:cNvPicPr>
+            <a:picLocks noChangeAspect="1"/>
+          </p:cNvPicPr>
+          <p:nvPr/>
+        </p:nvPicPr>
+        <p:blipFill>
+          <a:blip r:embed="rId3"/>
+          <a:stretch>
+            <a:fillRect/>
+          </a:stretch>
+        </p:blipFill>
+        <p:spPr>
+          <a:xfrm>
+            <a:off x="3904488" y="3035808"/>
+            <a:ext cx="237744" cy="237744"/>
+          </a:xfrm>
+          <a:prstGeom prst="rect">
+            <a:avLst/>
+          </a:prstGeom>
+        </p:spPr>
+      </p:pic>
+      <p:sp>
+        <p:nvSpPr>
+          <p:cNvPr id="14" name="Shape 10"/>
+          <p:cNvSpPr/>
+          <p:nvPr/>
+        </p:nvSpPr>
+        <p:spPr>
+          <a:xfrm>
+            <a:off x="4206240" y="2834640"/>
+            <a:ext cx="1463040" cy="640080"/>
+          </a:xfrm>
+          <a:prstGeom prst="roundRect">
+            <a:avLst>
+              <a:gd name="adj" fmla="val 11429"/>
+            </a:avLst>
+          </a:prstGeom>
+          <a:solidFill>
+            <a:schemeClr val="bg2"/>
+          </a:solidFill>
+          <a:ln/>
+        </p:spPr>
+        <p:txBody>
+          <a:bodyPr/>
+          <a:lstStyle/>
+          <a:p>
+            <a:endParaRPr lang="ja-JP" altLang="en-US"/>
+          </a:p>
+        </p:txBody>
+      </p:sp>
+      <p:sp>
+        <p:nvSpPr>
+          <p:cNvPr id="15" name="Text 11"/>
+          <p:cNvSpPr txBox="1"/>
+          <p:nvPr/>
+        </p:nvSpPr>
+        <p:spPr>
+          <a:xfrm>
+            <a:off x="4206240" y="2834640"/>
+            <a:ext cx="1463040" cy="640080"/>
+          </a:xfrm>
+          <a:prstGeom prst="rect">
+            <a:avLst/>
+          </a:prstGeom>
+          <a:noFill/>
+          <a:ln/>
+        </p:spPr>
+        <p:txBody>
+          <a:bodyPr wrap="square" lIns="0" tIns="0" rIns="0" bIns="0" rtlCol="0" anchor="ctr"/>
+          <a:lstStyle/>
+          <a:p>
+            <a:pPr marL="0" indent="0" algn="ctr">
+              <a:buNone/>
+            </a:pPr>
+            <a:r>
+              <a:rPr lang="en-US" sz="1700" b="1" dirty="0">
+                <a:solidFill>
+                  <a:schemeClr val="tx2"/>
+                </a:solidFill>
+              </a:rPr>
+              <a:t>振り返る</a:t>
+            </a:r>
+            <a:endParaRPr lang="en-US" sz="1700" dirty="0"/>
+          </a:p>
+        </p:txBody>
+      </p:sp>
+      <p:pic>
+        <p:nvPicPr>
+          <p:cNvPr id="16" name="Image 2" descr="preencoded.png"/>
+          <p:cNvPicPr>
+            <a:picLocks noChangeAspect="1"/>
+          </p:cNvPicPr>
+          <p:nvPr/>
+        </p:nvPicPr>
+        <p:blipFill>
+          <a:blip r:embed="rId3"/>
+          <a:stretch>
+            <a:fillRect/>
+          </a:stretch>
+        </p:blipFill>
+        <p:spPr>
+          <a:xfrm>
+            <a:off x="5733288" y="3035808"/>
+            <a:ext cx="237744" cy="237744"/>
+          </a:xfrm>
+          <a:prstGeom prst="rect">
+            <a:avLst/>
+          </a:prstGeom>
+        </p:spPr>
+      </p:pic>
+      <p:sp>
+        <p:nvSpPr>
+          <p:cNvPr id="17" name="Shape 12"/>
+          <p:cNvSpPr/>
+          <p:nvPr/>
+        </p:nvSpPr>
+        <p:spPr>
+          <a:xfrm>
+            <a:off x="6035040" y="2834640"/>
+            <a:ext cx="1463040" cy="640080"/>
+          </a:xfrm>
+          <a:prstGeom prst="roundRect">
+            <a:avLst>
+              <a:gd name="adj" fmla="val 11429"/>
+            </a:avLst>
+          </a:prstGeom>
+          <a:solidFill>
+            <a:schemeClr val="accent4"/>
+          </a:solidFill>
+          <a:ln/>
+        </p:spPr>
+        <p:txBody>
+          <a:bodyPr/>
+          <a:lstStyle/>
+          <a:p>
+            <a:endParaRPr lang="ja-JP" altLang="en-US"/>
+          </a:p>
+        </p:txBody>
+      </p:sp>
+      <p:sp>
+        <p:nvSpPr>
+          <p:cNvPr id="18" name="Text 13"/>
+          <p:cNvSpPr txBox="1"/>
+          <p:nvPr/>
+        </p:nvSpPr>
+        <p:spPr>
+          <a:xfrm>
+            <a:off x="6035040" y="2834640"/>
+            <a:ext cx="1463040" cy="640080"/>
+          </a:xfrm>
+          <a:prstGeom prst="rect">
+            <a:avLst/>
+          </a:prstGeom>
+          <a:noFill/>
+          <a:ln/>
+        </p:spPr>
+        <p:txBody>
+          <a:bodyPr wrap="square" lIns="0" tIns="0" rIns="0" bIns="0" rtlCol="0" anchor="ctr"/>
+          <a:lstStyle/>
+          <a:p>
+            <a:pPr marL="0" indent="0" algn="ctr">
+              <a:buNone/>
+            </a:pPr>
+            <a:r>
+              <a:rPr lang="en-US" sz="1700" b="1" dirty="0">
+                <a:solidFill>
+                  <a:schemeClr val="tx2"/>
+                </a:solidFill>
+              </a:rPr>
+              <a:t>調整する</a:t>
+            </a:r>
+            <a:endParaRPr lang="en-US" sz="1700" dirty="0"/>
+          </a:p>
+        </p:txBody>
+      </p:sp>
+      <p:sp>
+        <p:nvSpPr>
+          <p:cNvPr id="19" name="Shape 14"/>
+          <p:cNvSpPr/>
+          <p:nvPr/>
+        </p:nvSpPr>
+        <p:spPr>
+          <a:xfrm>
+            <a:off x="548640" y="3703320"/>
+            <a:ext cx="3017520" cy="1051560"/>
+          </a:xfrm>
+          <a:prstGeom prst="roundRect">
+            <a:avLst>
+              <a:gd name="adj" fmla="val 6957"/>
+            </a:avLst>
+          </a:prstGeom>
+          <a:solidFill>
+            <a:schemeClr val="bg2"/>
+          </a:solidFill>
+          <a:ln/>
+        </p:spPr>
+        <p:txBody>
+          <a:bodyPr/>
+          <a:lstStyle/>
+          <a:p>
+            <a:endParaRPr lang="ja-JP" altLang="en-US"/>
+          </a:p>
+        </p:txBody>
+      </p:sp>
+      <p:sp>
+        <p:nvSpPr>
+          <p:cNvPr id="20" name="Text 15"/>
+          <p:cNvSpPr txBox="1"/>
+          <p:nvPr/>
+        </p:nvSpPr>
+        <p:spPr>
+          <a:xfrm>
+            <a:off x="731520" y="3703320"/>
+            <a:ext cx="2651760" cy="1051560"/>
+          </a:xfrm>
+          <a:prstGeom prst="rect">
+            <a:avLst/>
+          </a:prstGeom>
+          <a:noFill/>
+          <a:ln/>
+        </p:spPr>
+        <p:txBody>
+          <a:bodyPr wrap="square" lIns="0" tIns="0" rIns="0" bIns="0" rtlCol="0" anchor="ctr"/>
+          <a:lstStyle/>
+          <a:p>
+            <a:pPr marL="0" indent="0">
+              <a:buNone/>
+            </a:pPr>
+            <a:r>
+              <a:rPr lang="en-US" sz="1700" b="1" dirty="0">
+                <a:solidFill>
+                  <a:schemeClr val="accent5"/>
+                </a:solidFill>
+              </a:rPr>
+              <a:t>自己管理</a:t>
+            </a:r>
+            <a:endParaRPr lang="en-US" sz="1700" dirty="0"/>
+          </a:p>
+          <a:p>
+            <a:pPr marL="0" indent="0">
+              <a:buNone/>
+            </a:pPr>
+            <a:r>
+              <a:rPr lang="en-US" sz="1300" dirty="0">
+                <a:solidFill>
+                  <a:schemeClr val="accent5"/>
+                </a:solidFill>
+              </a:rPr>
+              <a:t>計画どおりに進めることを重視</a:t>
+            </a:r>
+            <a:endParaRPr lang="en-US" sz="1700" dirty="0"/>
+          </a:p>
+        </p:txBody>
+      </p:sp>
+      <p:pic>
+        <p:nvPicPr>
+          <p:cNvPr id="21" name="Image 3" descr="preencoded.png"/>
+          <p:cNvPicPr>
+            <a:picLocks noChangeAspect="1"/>
+          </p:cNvPicPr>
+          <p:nvPr/>
+        </p:nvPicPr>
+        <p:blipFill>
+          <a:blip r:embed="rId4"/>
+          <a:stretch>
+            <a:fillRect/>
+          </a:stretch>
+        </p:blipFill>
+        <p:spPr>
+          <a:xfrm>
+            <a:off x="3840480" y="4046220"/>
+            <a:ext cx="365760" cy="365760"/>
+          </a:xfrm>
+          <a:prstGeom prst="rect">
+            <a:avLst/>
+          </a:prstGeom>
+        </p:spPr>
+      </p:pic>
+      <p:sp>
+        <p:nvSpPr>
+          <p:cNvPr id="22" name="Shape 16"/>
+          <p:cNvSpPr/>
+          <p:nvPr/>
+        </p:nvSpPr>
+        <p:spPr>
+          <a:xfrm>
+            <a:off x="4480560" y="3703320"/>
+            <a:ext cx="3017520" cy="1051560"/>
+          </a:xfrm>
+          <a:prstGeom prst="roundRect">
+            <a:avLst>
+              <a:gd name="adj" fmla="val 6957"/>
+            </a:avLst>
+          </a:prstGeom>
+          <a:solidFill>
+            <a:schemeClr val="tx2"/>
+          </a:solidFill>
+          <a:ln/>
+        </p:spPr>
+        <p:txBody>
+          <a:bodyPr/>
+          <a:lstStyle/>
+          <a:p>
+            <a:endParaRPr lang="ja-JP" altLang="en-US"/>
+          </a:p>
+        </p:txBody>
+      </p:sp>
+      <p:sp>
+        <p:nvSpPr>
+          <p:cNvPr id="23" name="Text 17"/>
+          <p:cNvSpPr txBox="1"/>
+          <p:nvPr/>
+        </p:nvSpPr>
+        <p:spPr>
+          <a:xfrm>
+            <a:off x="4663440" y="3703320"/>
+            <a:ext cx="2651760" cy="1051560"/>
+          </a:xfrm>
+          <a:prstGeom prst="rect">
+            <a:avLst/>
+          </a:prstGeom>
+          <a:noFill/>
+          <a:ln/>
+        </p:spPr>
+        <p:txBody>
+          <a:bodyPr wrap="square" lIns="0" tIns="0" rIns="0" bIns="0" rtlCol="0" anchor="ctr"/>
+          <a:lstStyle/>
+          <a:p>
+            <a:pPr marL="0" indent="0">
+              <a:buNone/>
+            </a:pPr>
+            <a:r>
+              <a:rPr lang="en-US" sz="1700" b="1" dirty="0">
+                <a:solidFill>
+                  <a:schemeClr val="bg1"/>
+                </a:solidFill>
+              </a:rPr>
+              <a:t>自己調整</a:t>
+            </a:r>
+            <a:endParaRPr lang="en-US" sz="1700" dirty="0"/>
+          </a:p>
+          <a:p>
+            <a:pPr marL="0" indent="0">
+              <a:buNone/>
+            </a:pPr>
+            <a:r>
+              <a:rPr lang="en-US" sz="1300" dirty="0">
+                <a:solidFill>
+                  <a:schemeClr val="accent6"/>
+                </a:solidFill>
+              </a:rPr>
+              <a:t>計画を修正しながら学ぶ</a:t>
+            </a:r>
+            <a:endParaRPr lang="en-US" sz="1700" dirty="0"/>
+          </a:p>
+        </p:txBody>
+      </p:sp>
+      <p:sp>
+        <p:nvSpPr>
+          <p:cNvPr id="24" name="Text 18"/>
+          <p:cNvSpPr txBox="1"/>
+          <p:nvPr/>
+        </p:nvSpPr>
+        <p:spPr>
+          <a:xfrm>
+            <a:off x="548640" y="4983480"/>
+            <a:ext cx="6949440" cy="1005840"/>
+          </a:xfrm>
+          <a:prstGeom prst="rect">
+            <a:avLst/>
+          </a:prstGeom>
+          <a:noFill/>
+          <a:ln/>
+        </p:spPr>
+        <p:txBody>
+          <a:bodyPr wrap="square" lIns="0" tIns="0" rIns="0" bIns="0" rtlCol="0" anchor="t"/>
+          <a:lstStyle/>
+          <a:p>
+            <a:pPr marL="0" indent="0">
+              <a:buNone/>
+            </a:pPr>
+            <a:r>
+              <a:rPr lang="en-US" sz="1500" b="1" dirty="0" err="1">
+                <a:solidFill>
+                  <a:schemeClr val="accent2"/>
+                </a:solidFill>
+              </a:rPr>
+              <a:t>教育課程に位置付け</a:t>
+            </a:r>
+            <a:r>
+              <a:rPr lang="en-US" sz="1500" b="1" dirty="0">
+                <a:solidFill>
+                  <a:schemeClr val="accent2"/>
+                </a:solidFill>
+              </a:rPr>
+              <a:t>　</a:t>
+            </a:r>
+          </a:p>
+          <a:p>
+            <a:pPr marL="0" indent="0">
+              <a:buNone/>
+            </a:pPr>
+            <a:r>
+              <a:rPr lang="en-US" sz="1500" dirty="0" err="1">
+                <a:solidFill>
+                  <a:schemeClr val="tx1"/>
+                </a:solidFill>
+              </a:rPr>
+              <a:t>国語・算数・理科・社会などの単元計画に位置付け、学校全体のシステムとして計画的に実施</a:t>
+            </a:r>
+            <a:endParaRPr lang="en-US" sz="1500" dirty="0"/>
+          </a:p>
+        </p:txBody>
+      </p:sp>
+      <p:sp>
+        <p:nvSpPr>
+          <p:cNvPr id="25" name="Slide Number Placeholder 0"/>
+          <p:cNvSpPr>
+            <a:spLocks noGrp="1"/>
+          </p:cNvSpPr>
+          <p:nvPr>
+            <p:ph type="sldNum" sz="quarter" idx="4294967295"/>
+          </p:nvPr>
+        </p:nvSpPr>
+        <p:spPr>
+          <a:xfrm>
+            <a:off x="11185855" y="6419088"/>
+            <a:ext cx="457200" cy="274320"/>
+          </a:xfrm>
+          <a:prstGeom prst="rect">
+            <a:avLst/>
+          </a:prstGeom>
+          <a:extLst>
+            <a:ext uri="{C572A759-6A51-4108-AA02-DFA0A04FC94B}">
+              <ma14:wrappingTextBoxFlag xmlns:ma14="http://schemas.microsoft.com/office/mac/drawingml/2011/main" xmlns="" val="0"/>
+            </a:ext>
+          </a:extLst>
+        </p:spPr>
+        <p:txBody>
+          <a:bodyPr/>
+          <a:lstStyle>
+            <a:lvl1pPr>
+              <a:defRPr sz="1000">
+                <a:solidFill>
+                  <a:schemeClr val="accent5"/>
+                </a:solidFill>
+              </a:defRPr>
+            </a:lvl1pPr>
+          </a:lstStyle>
+          <a:p>
+            <a:pPr algn="r"/>
+            <a:fld id="{F7021451-1387-4CA6-816F-3879F97B5CBC}" type="slidenum">
+              <a:rPr lang="en-US" b="0"/>
+              <a:t>8</a:t>
+            </a:fld>
+            <a:endParaRPr lang="en-US"/>
+          </a:p>
+        </p:txBody>
+      </p:sp>
+      <p:pic>
+        <p:nvPicPr>
+          <p:cNvPr id="26" name="写真 IMG_0115.JPG" descr="IMG_0115.JPG"/>
+          <p:cNvPicPr>
+            <a:picLocks noChangeAspect="1"/>
+          </p:cNvPicPr>
+          <p:nvPr/>
+        </p:nvPicPr>
+        <p:blipFill>
+          <a:blip r:embed="rId8"/>
+          <a:srcRect l="40" r="40"/>
+          <a:stretch>
+            <a:fillRect/>
+          </a:stretch>
+        </p:blipFill>
+        <p:spPr>
+          <a:xfrm>
+            <a:off x="7863840" y="1508760"/>
+            <a:ext cx="3776472" cy="2834640"/>
+          </a:xfrm>
+          <a:prstGeom prst="rect">
+            <a:avLst/>
+          </a:prstGeom>
+        </p:spPr>
+      </p:pic>
+      <p:pic>
+        <p:nvPicPr>
+          <p:cNvPr id="27" name="写真 IMG_0257.JPG" descr="IMG_0257.JPG"/>
+          <p:cNvPicPr>
+            <a:picLocks noChangeAspect="1"/>
+          </p:cNvPicPr>
+          <p:nvPr/>
+        </p:nvPicPr>
+        <p:blipFill>
+          <a:blip r:embed="rId9"/>
+          <a:srcRect r="14714"/>
+          <a:stretch>
+            <a:fillRect/>
+          </a:stretch>
+        </p:blipFill>
+        <p:spPr>
+          <a:xfrm>
+            <a:off x="7863840" y="4480560"/>
+            <a:ext cx="1819656" cy="1600200"/>
+          </a:xfrm>
+          <a:prstGeom prst="rect">
+            <a:avLst/>
+          </a:prstGeom>
+        </p:spPr>
+      </p:pic>
+      <p:pic>
+        <p:nvPicPr>
+          <p:cNvPr id="28" name="写真 IMG_0243.JPG" descr="image.JPG"/>
+          <p:cNvPicPr>
+            <a:picLocks noChangeAspect="1"/>
+          </p:cNvPicPr>
+          <p:nvPr/>
+        </p:nvPicPr>
+        <p:blipFill>
+          <a:blip r:embed="rId6"/>
+          <a:srcRect l="7357" r="7357"/>
+          <a:stretch>
+            <a:fillRect/>
+          </a:stretch>
+        </p:blipFill>
+        <p:spPr>
+          <a:xfrm>
+            <a:off x="9820656" y="4480560"/>
+            <a:ext cx="1819656" cy="1600200"/>
+          </a:xfrm>
+          <a:prstGeom prst="rect">
+            <a:avLst/>
+          </a:prstGeom>
+        </p:spPr>
+      </p:pic>
+    </p:spTree>
+  </p:cSld>
+  <p:clrMapOvr>
+    <a:masterClrMapping/>
+  </p:clrMapOvr>
+</p:sld>
+</file>
+
+<file path=ppt/slides/slide11.xml><?xml version="1.0" encoding="utf-8"?>
+<p:sld xmlns:a="http://schemas.openxmlformats.org/drawingml/2006/main" xmlns:r="http://schemas.openxmlformats.org/officeDocument/2006/relationships" xmlns:p="http://schemas.openxmlformats.org/presentationml/2006/main">
   <p:cSld name="Slide 7">
     <p:spTree>
       <p:nvGrpSpPr>
@@ -4924,7 +5835,7 @@
 </p:sld>
 </file>
 
-<file path=ppt/slides/slide11.xml><?xml version="1.0" encoding="utf-8"?>
+<file path=ppt/slides/slide12.xml><?xml version="1.0" encoding="utf-8"?>
 <p:sld xmlns:a="http://schemas.openxmlformats.org/drawingml/2006/main" xmlns:r="http://schemas.openxmlformats.org/officeDocument/2006/relationships" xmlns:p="http://schemas.openxmlformats.org/presentationml/2006/main">
   <p:cSld name="Slide 10">
     <p:spTree>
@@ -5693,7 +6604,7 @@
 </p:sld>
 </file>
 
-<file path=ppt/slides/slide12.xml><?xml version="1.0" encoding="utf-8"?>
+<file path=ppt/slides/slide13.xml><?xml version="1.0" encoding="utf-8"?>
 <p:sld xmlns:a="http://schemas.openxmlformats.org/drawingml/2006/main" xmlns:r="http://schemas.openxmlformats.org/officeDocument/2006/relationships" xmlns:p="http://schemas.openxmlformats.org/presentationml/2006/main">
   <p:cSld name="Slide 11">
     <p:spTree>
@@ -6548,7 +7459,7 @@
 </p:sld>
 </file>
 
-<file path=ppt/slides/slide13.xml><?xml version="1.0" encoding="utf-8"?>
+<file path=ppt/slides/slide14.xml><?xml version="1.0" encoding="utf-8"?>
 <p:sld xmlns:a="http://schemas.openxmlformats.org/drawingml/2006/main" xmlns:r="http://schemas.openxmlformats.org/officeDocument/2006/relationships" xmlns:p="http://schemas.openxmlformats.org/presentationml/2006/main">
   <p:cSld name="Slide 12">
     <p:spTree>
@@ -7530,7 +8441,7 @@
 </p:sld>
 </file>
 
-<file path=ppt/slides/slide14.xml><?xml version="1.0" encoding="utf-8"?>
+<file path=ppt/slides/slide15.xml><?xml version="1.0" encoding="utf-8"?>
 <p:sld xmlns:a="http://schemas.openxmlformats.org/drawingml/2006/main" xmlns:r="http://schemas.openxmlformats.org/officeDocument/2006/relationships" xmlns:p="http://schemas.openxmlformats.org/presentationml/2006/main">
   <p:cSld name="Slide 13">
     <p:spTree>
@@ -8504,7 +9415,7 @@
 </p:sld>
 </file>
 
-<file path=ppt/slides/slide15.xml><?xml version="1.0" encoding="utf-8"?>
+<file path=ppt/slides/slide16.xml><?xml version="1.0" encoding="utf-8"?>
 <p:sld xmlns:a="http://schemas.openxmlformats.org/drawingml/2006/main" xmlns:r="http://schemas.openxmlformats.org/officeDocument/2006/relationships" xmlns:p="http://schemas.openxmlformats.org/presentationml/2006/main">
   <p:cSld name="Slide 14">
     <p:spTree>
@@ -9880,7 +10791,7 @@
 </p:sld>
 </file>
 
-<file path=ppt/slides/slide16.xml><?xml version="1.0" encoding="utf-8"?>
+<file path=ppt/slides/slide17.xml><?xml version="1.0" encoding="utf-8"?>
 <p:sld xmlns:a="http://schemas.openxmlformats.org/drawingml/2006/main" xmlns:r="http://schemas.openxmlformats.org/officeDocument/2006/relationships" xmlns:p="http://schemas.openxmlformats.org/presentationml/2006/main">
   <p:cSld name="Slide 15">
     <p:spTree>
@@ -10686,7 +11597,7 @@
 </p:sld>
 </file>
 
-<file path=ppt/slides/slide17.xml><?xml version="1.0" encoding="utf-8"?>
+<file path=ppt/slides/slide18.xml><?xml version="1.0" encoding="utf-8"?>
 <p:sld xmlns:a="http://schemas.openxmlformats.org/drawingml/2006/main" xmlns:r="http://schemas.openxmlformats.org/officeDocument/2006/relationships" xmlns:p="http://schemas.openxmlformats.org/presentationml/2006/main">
   <p:cSld name="Slide 16">
     <p:spTree>
@@ -11386,7 +12297,7 @@
 </p:sld>
 </file>
 
-<file path=ppt/slides/slide18.xml><?xml version="1.0" encoding="utf-8"?>
+<file path=ppt/slides/slide19.xml><?xml version="1.0" encoding="utf-8"?>
 <p:sld xmlns:a="http://schemas.openxmlformats.org/drawingml/2006/main" xmlns:r="http://schemas.openxmlformats.org/officeDocument/2006/relationships" xmlns:p="http://schemas.openxmlformats.org/presentationml/2006/main">
   <p:cSld name="Slide 17">
     <p:spTree>
@@ -12114,720 +13025,6 @@
           </a:p>
         </p:txBody>
       </p:sp>
-    </p:spTree>
-  </p:cSld>
-  <p:clrMapOvr>
-    <a:masterClrMapping/>
-  </p:clrMapOvr>
-</p:sld>
-</file>
-
-<file path=ppt/slides/slide19.xml><?xml version="1.0" encoding="utf-8"?>
-<p:sld xmlns:a="http://schemas.openxmlformats.org/drawingml/2006/main" xmlns:p="http://schemas.openxmlformats.org/presentationml/2006/main" xmlns:r="http://schemas.openxmlformats.org/officeDocument/2006/relationships">
-  <p:cSld>
-    <p:spTree>
-      <p:nvGrpSpPr>
-        <p:cNvPr id="1" name=""/>
-        <p:cNvGrpSpPr/>
-        <p:nvPr/>
-      </p:nvGrpSpPr>
-      <p:grpSpPr/>
-      <p:sp>
-        <p:nvSpPr>
-          <p:cNvPr id="2" name="Text Placeholder 1"/>
-          <p:cNvSpPr>
-            <a:spLocks noGrp="1"/>
-          </p:cNvSpPr>
-          <p:nvPr>
-            <p:ph type="body" idx="100"/>
-          </p:nvPr>
-        </p:nvSpPr>
-        <p:spPr/>
-        <p:txBody>
-          <a:bodyPr/>
-          <a:lstStyle/>
-          <a:p>
-            <a:r>
-              <a:t>01　天童中部小学校の取組</a:t>
-            </a:r>
-          </a:p>
-        </p:txBody>
-      </p:sp>
-      <p:sp>
-        <p:nvSpPr>
-          <p:cNvPr id="3" name="Title 2"/>
-          <p:cNvSpPr>
-            <a:spLocks noGrp="1"/>
-          </p:cNvSpPr>
-          <p:nvPr>
-            <p:ph type="title" idx="101"/>
-          </p:nvPr>
-        </p:nvSpPr>
-        <p:spPr/>
-        <p:txBody>
-          <a:bodyPr/>
-          <a:lstStyle/>
-          <a:p>
-            <a:r>
-              <a:t>土台は約８割の普段の授業</a:t>
-            </a:r>
-          </a:p>
-        </p:txBody>
-      </p:sp>
-      <p:sp>
-        <p:nvSpPr>
-          <p:cNvPr id="4" name="TextBox 3"/>
-          <p:cNvSpPr txBox="1"/>
-          <p:nvPr/>
-        </p:nvSpPr>
-        <p:spPr>
-          <a:xfrm>
-            <a:off x="548640" y="1508760"/>
-            <a:ext cx="4754880" cy="365760"/>
-          </a:xfrm>
-          <a:prstGeom prst="rect">
-            <a:avLst/>
-          </a:prstGeom>
-          <a:noFill/>
-        </p:spPr>
-        <p:txBody>
-          <a:bodyPr wrap="square" lIns="0" rIns="0" tIns="0" bIns="0" anchor="ctr">
-            <a:spAutoFit/>
-          </a:bodyPr>
-          <a:lstStyle/>
-          <a:p>
-            <a:pPr algn="l"/>
-            <a:r>
-              <a:rPr sz="1500" b="1">
-                <a:solidFill>
-                  <a:srgbClr val="D9702C"/>
-                </a:solidFill>
-              </a:rPr>
-              <a:t>子供と教師が共に創る授業（公開授業から）</a:t>
-            </a:r>
-          </a:p>
-        </p:txBody>
-      </p:sp>
-      <p:sp>
-        <p:nvSpPr>
-          <p:cNvPr id="5" name="Rounded Rectangle 4"/>
-          <p:cNvSpPr/>
-          <p:nvPr/>
-        </p:nvSpPr>
-        <p:spPr>
-          <a:xfrm>
-            <a:off x="548640" y="1965960"/>
-            <a:ext cx="4754880" cy="868680"/>
-          </a:xfrm>
-          <a:prstGeom prst="roundRect">
-            <a:avLst>
-              <a:gd name="adj" fmla="val 8000"/>
-            </a:avLst>
-          </a:prstGeom>
-          <a:solidFill>
-            <a:srgbClr val="EEF4F0"/>
-          </a:solidFill>
-          <a:ln>
-            <a:noFill/>
-          </a:ln>
-          <a:effectLst/>
-        </p:spPr>
-        <p:style>
-          <a:lnRef idx="1">
-            <a:schemeClr val="accent1"/>
-          </a:lnRef>
-          <a:fillRef idx="3">
-            <a:schemeClr val="accent1"/>
-          </a:fillRef>
-          <a:effectRef idx="2">
-            <a:schemeClr val="accent1"/>
-          </a:effectRef>
-          <a:fontRef idx="minor">
-            <a:schemeClr val="lt1"/>
-          </a:fontRef>
-        </p:style>
-        <p:txBody>
-          <a:bodyPr rtlCol="0" anchor="ctr"/>
-          <a:lstStyle/>
-          <a:p>
-            <a:pPr algn="ctr"/>
-          </a:p>
-        </p:txBody>
-      </p:sp>
-      <p:sp>
-        <p:nvSpPr>
-          <p:cNvPr id="6" name="Oval 5"/>
-          <p:cNvSpPr/>
-          <p:nvPr/>
-        </p:nvSpPr>
-        <p:spPr>
-          <a:xfrm>
-            <a:off x="731520" y="2148840"/>
-            <a:ext cx="502920" cy="502920"/>
-          </a:xfrm>
-          <a:prstGeom prst="ellipse">
-            <a:avLst/>
-          </a:prstGeom>
-          <a:solidFill>
-            <a:srgbClr val="1F5A47"/>
-          </a:solidFill>
-          <a:ln>
-            <a:noFill/>
-          </a:ln>
-          <a:effectLst/>
-        </p:spPr>
-        <p:style>
-          <a:lnRef idx="1">
-            <a:schemeClr val="accent1"/>
-          </a:lnRef>
-          <a:fillRef idx="3">
-            <a:schemeClr val="accent1"/>
-          </a:fillRef>
-          <a:effectRef idx="2">
-            <a:schemeClr val="accent1"/>
-          </a:effectRef>
-          <a:fontRef idx="minor">
-            <a:schemeClr val="lt1"/>
-          </a:fontRef>
-        </p:style>
-        <p:txBody>
-          <a:bodyPr rtlCol="0" anchor="ctr" lIns="0" rIns="0" tIns="0" bIns="0"/>
-          <a:lstStyle/>
-          <a:p>
-            <a:pPr algn="ctr"/>
-            <a:r>
-              <a:rPr sz="1600" b="1">
-                <a:solidFill>
-                  <a:srgbClr val="FFFFFF"/>
-                </a:solidFill>
-              </a:rPr>
-              <a:t>1</a:t>
-            </a:r>
-          </a:p>
-        </p:txBody>
-      </p:sp>
-      <p:sp>
-        <p:nvSpPr>
-          <p:cNvPr id="7" name="TextBox 6"/>
-          <p:cNvSpPr txBox="1"/>
-          <p:nvPr/>
-        </p:nvSpPr>
-        <p:spPr>
-          <a:xfrm>
-            <a:off x="1417320" y="2011679"/>
-            <a:ext cx="3749039" cy="777240"/>
-          </a:xfrm>
-          <a:prstGeom prst="rect">
-            <a:avLst/>
-          </a:prstGeom>
-          <a:noFill/>
-        </p:spPr>
-        <p:txBody>
-          <a:bodyPr wrap="square" lIns="0" rIns="0" tIns="0" bIns="0" anchor="ctr">
-            <a:spAutoFit/>
-          </a:bodyPr>
-          <a:lstStyle/>
-          <a:p>
-            <a:pPr algn="l"/>
-            <a:r>
-              <a:rPr sz="1600" b="1">
-                <a:solidFill>
-                  <a:srgbClr val="1F5A47"/>
-                </a:solidFill>
-              </a:rPr>
-              <a:t>学び方を言葉で示す</a:t>
-            </a:r>
-          </a:p>
-          <a:p>
-            <a:pPr algn="l"/>
-            <a:r>
-              <a:rPr sz="1300" b="0">
-                <a:solidFill>
-                  <a:srgbClr val="1E2B27"/>
-                </a:solidFill>
-              </a:rPr>
-              <a:t>「答えだけ」でなく「式の意味、図と結びつける」</a:t>
-            </a:r>
-          </a:p>
-        </p:txBody>
-      </p:sp>
-      <p:sp>
-        <p:nvSpPr>
-          <p:cNvPr id="8" name="Rounded Rectangle 7"/>
-          <p:cNvSpPr/>
-          <p:nvPr/>
-        </p:nvSpPr>
-        <p:spPr>
-          <a:xfrm>
-            <a:off x="548640" y="2971800"/>
-            <a:ext cx="4754880" cy="868680"/>
-          </a:xfrm>
-          <a:prstGeom prst="roundRect">
-            <a:avLst>
-              <a:gd name="adj" fmla="val 8000"/>
-            </a:avLst>
-          </a:prstGeom>
-          <a:solidFill>
-            <a:srgbClr val="EEF4F0"/>
-          </a:solidFill>
-          <a:ln>
-            <a:noFill/>
-          </a:ln>
-          <a:effectLst/>
-        </p:spPr>
-        <p:style>
-          <a:lnRef idx="1">
-            <a:schemeClr val="accent1"/>
-          </a:lnRef>
-          <a:fillRef idx="3">
-            <a:schemeClr val="accent1"/>
-          </a:fillRef>
-          <a:effectRef idx="2">
-            <a:schemeClr val="accent1"/>
-          </a:effectRef>
-          <a:fontRef idx="minor">
-            <a:schemeClr val="lt1"/>
-          </a:fontRef>
-        </p:style>
-        <p:txBody>
-          <a:bodyPr rtlCol="0" anchor="ctr"/>
-          <a:lstStyle/>
-          <a:p>
-            <a:pPr algn="ctr"/>
-          </a:p>
-        </p:txBody>
-      </p:sp>
-      <p:sp>
-        <p:nvSpPr>
-          <p:cNvPr id="9" name="Oval 8"/>
-          <p:cNvSpPr/>
-          <p:nvPr/>
-        </p:nvSpPr>
-        <p:spPr>
-          <a:xfrm>
-            <a:off x="731520" y="3154680"/>
-            <a:ext cx="502920" cy="502920"/>
-          </a:xfrm>
-          <a:prstGeom prst="ellipse">
-            <a:avLst/>
-          </a:prstGeom>
-          <a:solidFill>
-            <a:srgbClr val="1F5A47"/>
-          </a:solidFill>
-          <a:ln>
-            <a:noFill/>
-          </a:ln>
-          <a:effectLst/>
-        </p:spPr>
-        <p:style>
-          <a:lnRef idx="1">
-            <a:schemeClr val="accent1"/>
-          </a:lnRef>
-          <a:fillRef idx="3">
-            <a:schemeClr val="accent1"/>
-          </a:fillRef>
-          <a:effectRef idx="2">
-            <a:schemeClr val="accent1"/>
-          </a:effectRef>
-          <a:fontRef idx="minor">
-            <a:schemeClr val="lt1"/>
-          </a:fontRef>
-        </p:style>
-        <p:txBody>
-          <a:bodyPr rtlCol="0" anchor="ctr" lIns="0" rIns="0" tIns="0" bIns="0"/>
-          <a:lstStyle/>
-          <a:p>
-            <a:pPr algn="ctr"/>
-            <a:r>
-              <a:rPr sz="1600" b="1">
-                <a:solidFill>
-                  <a:srgbClr val="FFFFFF"/>
-                </a:solidFill>
-              </a:rPr>
-              <a:t>2</a:t>
-            </a:r>
-          </a:p>
-        </p:txBody>
-      </p:sp>
-      <p:sp>
-        <p:nvSpPr>
-          <p:cNvPr id="10" name="TextBox 9"/>
-          <p:cNvSpPr txBox="1"/>
-          <p:nvPr/>
-        </p:nvSpPr>
-        <p:spPr>
-          <a:xfrm>
-            <a:off x="1417320" y="3017520"/>
-            <a:ext cx="3749039" cy="777240"/>
-          </a:xfrm>
-          <a:prstGeom prst="rect">
-            <a:avLst/>
-          </a:prstGeom>
-          <a:noFill/>
-        </p:spPr>
-        <p:txBody>
-          <a:bodyPr wrap="square" lIns="0" rIns="0" tIns="0" bIns="0" anchor="ctr">
-            <a:spAutoFit/>
-          </a:bodyPr>
-          <a:lstStyle/>
-          <a:p>
-            <a:pPr algn="l"/>
-            <a:r>
-              <a:rPr sz="1600" b="1">
-                <a:solidFill>
-                  <a:srgbClr val="1F5A47"/>
-                </a:solidFill>
-              </a:rPr>
-              <a:t>考えを出し合い、つなぐ</a:t>
-            </a:r>
-          </a:p>
-          <a:p>
-            <a:pPr algn="l"/>
-            <a:r>
-              <a:rPr sz="1300" b="0">
-                <a:solidFill>
-                  <a:srgbClr val="1E2B27"/>
-                </a:solidFill>
-              </a:rPr>
-              <a:t>子供が黒板に考えを書き、全体で練り上げる</a:t>
-            </a:r>
-          </a:p>
-        </p:txBody>
-      </p:sp>
-      <p:sp>
-        <p:nvSpPr>
-          <p:cNvPr id="11" name="Rounded Rectangle 10"/>
-          <p:cNvSpPr/>
-          <p:nvPr/>
-        </p:nvSpPr>
-        <p:spPr>
-          <a:xfrm>
-            <a:off x="548640" y="3977639"/>
-            <a:ext cx="4754880" cy="868680"/>
-          </a:xfrm>
-          <a:prstGeom prst="roundRect">
-            <a:avLst>
-              <a:gd name="adj" fmla="val 8000"/>
-            </a:avLst>
-          </a:prstGeom>
-          <a:solidFill>
-            <a:srgbClr val="EEF4F0"/>
-          </a:solidFill>
-          <a:ln>
-            <a:noFill/>
-          </a:ln>
-          <a:effectLst/>
-        </p:spPr>
-        <p:style>
-          <a:lnRef idx="1">
-            <a:schemeClr val="accent1"/>
-          </a:lnRef>
-          <a:fillRef idx="3">
-            <a:schemeClr val="accent1"/>
-          </a:fillRef>
-          <a:effectRef idx="2">
-            <a:schemeClr val="accent1"/>
-          </a:effectRef>
-          <a:fontRef idx="minor">
-            <a:schemeClr val="lt1"/>
-          </a:fontRef>
-        </p:style>
-        <p:txBody>
-          <a:bodyPr rtlCol="0" anchor="ctr"/>
-          <a:lstStyle/>
-          <a:p>
-            <a:pPr algn="ctr"/>
-          </a:p>
-        </p:txBody>
-      </p:sp>
-      <p:sp>
-        <p:nvSpPr>
-          <p:cNvPr id="12" name="Oval 11"/>
-          <p:cNvSpPr/>
-          <p:nvPr/>
-        </p:nvSpPr>
-        <p:spPr>
-          <a:xfrm>
-            <a:off x="731520" y="4160520"/>
-            <a:ext cx="502920" cy="502920"/>
-          </a:xfrm>
-          <a:prstGeom prst="ellipse">
-            <a:avLst/>
-          </a:prstGeom>
-          <a:solidFill>
-            <a:srgbClr val="D9702C"/>
-          </a:solidFill>
-          <a:ln>
-            <a:noFill/>
-          </a:ln>
-          <a:effectLst/>
-        </p:spPr>
-        <p:style>
-          <a:lnRef idx="1">
-            <a:schemeClr val="accent1"/>
-          </a:lnRef>
-          <a:fillRef idx="3">
-            <a:schemeClr val="accent1"/>
-          </a:fillRef>
-          <a:effectRef idx="2">
-            <a:schemeClr val="accent1"/>
-          </a:effectRef>
-          <a:fontRef idx="minor">
-            <a:schemeClr val="lt1"/>
-          </a:fontRef>
-        </p:style>
-        <p:txBody>
-          <a:bodyPr rtlCol="0" anchor="ctr" lIns="0" rIns="0" tIns="0" bIns="0"/>
-          <a:lstStyle/>
-          <a:p>
-            <a:pPr algn="ctr"/>
-            <a:r>
-              <a:rPr sz="1600" b="1">
-                <a:solidFill>
-                  <a:srgbClr val="FFFFFF"/>
-                </a:solidFill>
-              </a:rPr>
-              <a:t>3</a:t>
-            </a:r>
-          </a:p>
-        </p:txBody>
-      </p:sp>
-      <p:sp>
-        <p:nvSpPr>
-          <p:cNvPr id="13" name="TextBox 12"/>
-          <p:cNvSpPr txBox="1"/>
-          <p:nvPr/>
-        </p:nvSpPr>
-        <p:spPr>
-          <a:xfrm>
-            <a:off x="1417320" y="4023359"/>
-            <a:ext cx="3749039" cy="777240"/>
-          </a:xfrm>
-          <a:prstGeom prst="rect">
-            <a:avLst/>
-          </a:prstGeom>
-          <a:noFill/>
-        </p:spPr>
-        <p:txBody>
-          <a:bodyPr wrap="square" lIns="0" rIns="0" tIns="0" bIns="0" anchor="ctr">
-            <a:spAutoFit/>
-          </a:bodyPr>
-          <a:lstStyle/>
-          <a:p>
-            <a:pPr algn="l"/>
-            <a:r>
-              <a:rPr sz="1600" b="1">
-                <a:solidFill>
-                  <a:srgbClr val="1F5A47"/>
-                </a:solidFill>
-              </a:rPr>
-              <a:t>任せる２割を支える</a:t>
-            </a:r>
-          </a:p>
-          <a:p>
-            <a:pPr algn="l"/>
-            <a:r>
-              <a:rPr sz="1300" b="0">
-                <a:solidFill>
-                  <a:srgbClr val="1E2B27"/>
-                </a:solidFill>
-              </a:rPr>
-              <a:t>身に付けた学び方がMP学習・FSPで生きる</a:t>
-            </a:r>
-          </a:p>
-        </p:txBody>
-      </p:sp>
-      <p:sp>
-        <p:nvSpPr>
-          <p:cNvPr id="14" name="Rounded Rectangle 13"/>
-          <p:cNvSpPr/>
-          <p:nvPr/>
-        </p:nvSpPr>
-        <p:spPr>
-          <a:xfrm>
-            <a:off x="548640" y="5029200"/>
-            <a:ext cx="4754880" cy="1051560"/>
-          </a:xfrm>
-          <a:prstGeom prst="roundRect">
-            <a:avLst>
-              <a:gd name="adj" fmla="val 8000"/>
-            </a:avLst>
-          </a:prstGeom>
-          <a:solidFill>
-            <a:srgbClr val="1F5A47"/>
-          </a:solidFill>
-          <a:ln>
-            <a:noFill/>
-          </a:ln>
-          <a:effectLst/>
-        </p:spPr>
-        <p:style>
-          <a:lnRef idx="1">
-            <a:schemeClr val="accent1"/>
-          </a:lnRef>
-          <a:fillRef idx="3">
-            <a:schemeClr val="accent1"/>
-          </a:fillRef>
-          <a:effectRef idx="2">
-            <a:schemeClr val="accent1"/>
-          </a:effectRef>
-          <a:fontRef idx="minor">
-            <a:schemeClr val="lt1"/>
-          </a:fontRef>
-        </p:style>
-        <p:txBody>
-          <a:bodyPr rtlCol="0" anchor="ctr"/>
-          <a:lstStyle/>
-          <a:p>
-            <a:pPr algn="ctr"/>
-          </a:p>
-        </p:txBody>
-      </p:sp>
-      <p:sp>
-        <p:nvSpPr>
-          <p:cNvPr id="15" name="TextBox 14"/>
-          <p:cNvSpPr txBox="1"/>
-          <p:nvPr/>
-        </p:nvSpPr>
-        <p:spPr>
-          <a:xfrm>
-            <a:off x="777240" y="5029200"/>
-            <a:ext cx="4297680" cy="1051560"/>
-          </a:xfrm>
-          <a:prstGeom prst="rect">
-            <a:avLst/>
-          </a:prstGeom>
-          <a:noFill/>
-        </p:spPr>
-        <p:txBody>
-          <a:bodyPr wrap="square" lIns="0" rIns="0" tIns="0" bIns="0" anchor="ctr">
-            <a:spAutoFit/>
-          </a:bodyPr>
-          <a:lstStyle/>
-          <a:p>
-            <a:pPr algn="l"/>
-            <a:r>
-              <a:rPr sz="1700" b="1">
-                <a:solidFill>
-                  <a:srgbClr val="FFFFFF"/>
-                </a:solidFill>
-              </a:rPr>
-              <a:t>子供に任せる２割は、</a:t>
-            </a:r>
-          </a:p>
-          <a:p>
-            <a:pPr algn="l"/>
-            <a:r>
-              <a:rPr sz="1700" b="1">
-                <a:solidFill>
-                  <a:srgbClr val="FBEADB"/>
-                </a:solidFill>
-              </a:rPr>
-              <a:t>８割の普段の授業が支えている</a:t>
-            </a:r>
-          </a:p>
-        </p:txBody>
-      </p:sp>
-      <p:pic>
-        <p:nvPicPr>
-          <p:cNvPr id="16" name="写真 IMG_0320.JPG" descr="IMG_0320.JPG"/>
-          <p:cNvPicPr>
-            <a:picLocks noChangeAspect="1"/>
-          </p:cNvPicPr>
-          <p:nvPr/>
-        </p:nvPicPr>
-        <p:blipFill>
-          <a:blip r:embed="rId2"/>
-          <a:srcRect t="126" b="126"/>
-          <a:stretch>
-            <a:fillRect/>
-          </a:stretch>
-        </p:blipFill>
-        <p:spPr>
-          <a:xfrm>
-            <a:off x="5577840" y="1508760"/>
-            <a:ext cx="2964027" cy="2217420"/>
-          </a:xfrm>
-          <a:prstGeom prst="rect">
-            <a:avLst/>
-          </a:prstGeom>
-        </p:spPr>
-      </p:pic>
-      <p:pic>
-        <p:nvPicPr>
-          <p:cNvPr id="17" name="写真 IMG_0318.JPG" descr="IMG_0318.JPG"/>
-          <p:cNvPicPr>
-            <a:picLocks noChangeAspect="1"/>
-          </p:cNvPicPr>
-          <p:nvPr/>
-        </p:nvPicPr>
-        <p:blipFill>
-          <a:blip r:embed="rId3"/>
-          <a:srcRect t="126" b="126"/>
-          <a:stretch>
-            <a:fillRect/>
-          </a:stretch>
-        </p:blipFill>
-        <p:spPr>
-          <a:xfrm>
-            <a:off x="8679027" y="1508760"/>
-            <a:ext cx="2964027" cy="2217420"/>
-          </a:xfrm>
-          <a:prstGeom prst="rect">
-            <a:avLst/>
-          </a:prstGeom>
-        </p:spPr>
-      </p:pic>
-      <p:pic>
-        <p:nvPicPr>
-          <p:cNvPr id="18" name="写真 IMG_0268.JPG" descr="IMG_0268.JPG"/>
-          <p:cNvPicPr>
-            <a:picLocks noChangeAspect="1"/>
-          </p:cNvPicPr>
-          <p:nvPr/>
-        </p:nvPicPr>
-        <p:blipFill>
-          <a:blip r:embed="rId4"/>
-          <a:srcRect b="252"/>
-          <a:stretch>
-            <a:fillRect/>
-          </a:stretch>
-        </p:blipFill>
-        <p:spPr>
-          <a:xfrm>
-            <a:off x="5577840" y="3863339"/>
-            <a:ext cx="2964027" cy="2217420"/>
-          </a:xfrm>
-          <a:prstGeom prst="rect">
-            <a:avLst/>
-          </a:prstGeom>
-        </p:spPr>
-      </p:pic>
-      <p:pic>
-        <p:nvPicPr>
-          <p:cNvPr id="19" name="写真 IMG_0270.JPG" descr="IMG_0270.JPG"/>
-          <p:cNvPicPr>
-            <a:picLocks noChangeAspect="1"/>
-          </p:cNvPicPr>
-          <p:nvPr/>
-        </p:nvPicPr>
-        <p:blipFill>
-          <a:blip r:embed="rId5"/>
-          <a:srcRect t="126" b="126"/>
-          <a:stretch>
-            <a:fillRect/>
-          </a:stretch>
-        </p:blipFill>
-        <p:spPr>
-          <a:xfrm>
-            <a:off x="8679027" y="3863339"/>
-            <a:ext cx="2964027" cy="2217420"/>
-          </a:xfrm>
-          <a:prstGeom prst="rect">
-            <a:avLst/>
-          </a:prstGeom>
-        </p:spPr>
-      </p:pic>
     </p:spTree>
   </p:cSld>
   <p:clrMapOvr>
@@ -17599,6 +17796,720 @@
 </file>
 
 <file path=ppt/slides/slide7.xml><?xml version="1.0" encoding="utf-8"?>
+<p:sld xmlns:a="http://schemas.openxmlformats.org/drawingml/2006/main" xmlns:p="http://schemas.openxmlformats.org/presentationml/2006/main" xmlns:r="http://schemas.openxmlformats.org/officeDocument/2006/relationships">
+  <p:cSld>
+    <p:spTree>
+      <p:nvGrpSpPr>
+        <p:cNvPr id="1" name=""/>
+        <p:cNvGrpSpPr/>
+        <p:nvPr/>
+      </p:nvGrpSpPr>
+      <p:grpSpPr/>
+      <p:sp>
+        <p:nvSpPr>
+          <p:cNvPr id="2" name="Text Placeholder 1"/>
+          <p:cNvSpPr>
+            <a:spLocks noGrp="1"/>
+          </p:cNvSpPr>
+          <p:nvPr>
+            <p:ph type="body" idx="100"/>
+          </p:nvPr>
+        </p:nvSpPr>
+        <p:spPr/>
+        <p:txBody>
+          <a:bodyPr/>
+          <a:lstStyle/>
+          <a:p>
+            <a:r>
+              <a:t>01　天童中部小学校の取組</a:t>
+            </a:r>
+          </a:p>
+        </p:txBody>
+      </p:sp>
+      <p:sp>
+        <p:nvSpPr>
+          <p:cNvPr id="3" name="Title 2"/>
+          <p:cNvSpPr>
+            <a:spLocks noGrp="1"/>
+          </p:cNvSpPr>
+          <p:nvPr>
+            <p:ph type="title" idx="101"/>
+          </p:nvPr>
+        </p:nvSpPr>
+        <p:spPr/>
+        <p:txBody>
+          <a:bodyPr/>
+          <a:lstStyle/>
+          <a:p>
+            <a:r>
+              <a:t>土台は約８割の普段の授業</a:t>
+            </a:r>
+          </a:p>
+        </p:txBody>
+      </p:sp>
+      <p:sp>
+        <p:nvSpPr>
+          <p:cNvPr id="4" name="TextBox 3"/>
+          <p:cNvSpPr txBox="1"/>
+          <p:nvPr/>
+        </p:nvSpPr>
+        <p:spPr>
+          <a:xfrm>
+            <a:off x="548640" y="1508760"/>
+            <a:ext cx="4754880" cy="365760"/>
+          </a:xfrm>
+          <a:prstGeom prst="rect">
+            <a:avLst/>
+          </a:prstGeom>
+          <a:noFill/>
+        </p:spPr>
+        <p:txBody>
+          <a:bodyPr wrap="square" lIns="0" rIns="0" tIns="0" bIns="0" anchor="ctr">
+            <a:spAutoFit/>
+          </a:bodyPr>
+          <a:lstStyle/>
+          <a:p>
+            <a:pPr algn="l"/>
+            <a:r>
+              <a:rPr sz="1500" b="1">
+                <a:solidFill>
+                  <a:srgbClr val="D9702C"/>
+                </a:solidFill>
+              </a:rPr>
+              <a:t>子供と教師が共に創る授業（公開授業から）</a:t>
+            </a:r>
+          </a:p>
+        </p:txBody>
+      </p:sp>
+      <p:sp>
+        <p:nvSpPr>
+          <p:cNvPr id="5" name="Rounded Rectangle 4"/>
+          <p:cNvSpPr/>
+          <p:nvPr/>
+        </p:nvSpPr>
+        <p:spPr>
+          <a:xfrm>
+            <a:off x="548640" y="1965960"/>
+            <a:ext cx="4754880" cy="868680"/>
+          </a:xfrm>
+          <a:prstGeom prst="roundRect">
+            <a:avLst>
+              <a:gd name="adj" fmla="val 8000"/>
+            </a:avLst>
+          </a:prstGeom>
+          <a:solidFill>
+            <a:srgbClr val="EEF4F0"/>
+          </a:solidFill>
+          <a:ln>
+            <a:noFill/>
+          </a:ln>
+          <a:effectLst/>
+        </p:spPr>
+        <p:style>
+          <a:lnRef idx="1">
+            <a:schemeClr val="accent1"/>
+          </a:lnRef>
+          <a:fillRef idx="3">
+            <a:schemeClr val="accent1"/>
+          </a:fillRef>
+          <a:effectRef idx="2">
+            <a:schemeClr val="accent1"/>
+          </a:effectRef>
+          <a:fontRef idx="minor">
+            <a:schemeClr val="lt1"/>
+          </a:fontRef>
+        </p:style>
+        <p:txBody>
+          <a:bodyPr rtlCol="0" anchor="ctr"/>
+          <a:lstStyle/>
+          <a:p>
+            <a:pPr algn="ctr"/>
+          </a:p>
+        </p:txBody>
+      </p:sp>
+      <p:sp>
+        <p:nvSpPr>
+          <p:cNvPr id="6" name="Oval 5"/>
+          <p:cNvSpPr/>
+          <p:nvPr/>
+        </p:nvSpPr>
+        <p:spPr>
+          <a:xfrm>
+            <a:off x="731520" y="2148840"/>
+            <a:ext cx="502920" cy="502920"/>
+          </a:xfrm>
+          <a:prstGeom prst="ellipse">
+            <a:avLst/>
+          </a:prstGeom>
+          <a:solidFill>
+            <a:srgbClr val="1F5A47"/>
+          </a:solidFill>
+          <a:ln>
+            <a:noFill/>
+          </a:ln>
+          <a:effectLst/>
+        </p:spPr>
+        <p:style>
+          <a:lnRef idx="1">
+            <a:schemeClr val="accent1"/>
+          </a:lnRef>
+          <a:fillRef idx="3">
+            <a:schemeClr val="accent1"/>
+          </a:fillRef>
+          <a:effectRef idx="2">
+            <a:schemeClr val="accent1"/>
+          </a:effectRef>
+          <a:fontRef idx="minor">
+            <a:schemeClr val="lt1"/>
+          </a:fontRef>
+        </p:style>
+        <p:txBody>
+          <a:bodyPr rtlCol="0" anchor="ctr" lIns="0" rIns="0" tIns="0" bIns="0"/>
+          <a:lstStyle/>
+          <a:p>
+            <a:pPr algn="ctr"/>
+            <a:r>
+              <a:rPr sz="1600" b="1">
+                <a:solidFill>
+                  <a:srgbClr val="FFFFFF"/>
+                </a:solidFill>
+              </a:rPr>
+              <a:t>1</a:t>
+            </a:r>
+          </a:p>
+        </p:txBody>
+      </p:sp>
+      <p:sp>
+        <p:nvSpPr>
+          <p:cNvPr id="7" name="TextBox 6"/>
+          <p:cNvSpPr txBox="1"/>
+          <p:nvPr/>
+        </p:nvSpPr>
+        <p:spPr>
+          <a:xfrm>
+            <a:off x="1417320" y="2011679"/>
+            <a:ext cx="3749039" cy="777240"/>
+          </a:xfrm>
+          <a:prstGeom prst="rect">
+            <a:avLst/>
+          </a:prstGeom>
+          <a:noFill/>
+        </p:spPr>
+        <p:txBody>
+          <a:bodyPr wrap="square" lIns="0" rIns="0" tIns="0" bIns="0" anchor="ctr">
+            <a:spAutoFit/>
+          </a:bodyPr>
+          <a:lstStyle/>
+          <a:p>
+            <a:pPr algn="l"/>
+            <a:r>
+              <a:rPr sz="1600" b="1">
+                <a:solidFill>
+                  <a:srgbClr val="1F5A47"/>
+                </a:solidFill>
+              </a:rPr>
+              <a:t>学び方を言葉で示す</a:t>
+            </a:r>
+          </a:p>
+          <a:p>
+            <a:pPr algn="l"/>
+            <a:r>
+              <a:rPr sz="1300" b="0">
+                <a:solidFill>
+                  <a:srgbClr val="1E2B27"/>
+                </a:solidFill>
+              </a:rPr>
+              <a:t>「答えだけ」でなく「式の意味、図と結びつける」</a:t>
+            </a:r>
+          </a:p>
+        </p:txBody>
+      </p:sp>
+      <p:sp>
+        <p:nvSpPr>
+          <p:cNvPr id="8" name="Rounded Rectangle 7"/>
+          <p:cNvSpPr/>
+          <p:nvPr/>
+        </p:nvSpPr>
+        <p:spPr>
+          <a:xfrm>
+            <a:off x="548640" y="2971800"/>
+            <a:ext cx="4754880" cy="868680"/>
+          </a:xfrm>
+          <a:prstGeom prst="roundRect">
+            <a:avLst>
+              <a:gd name="adj" fmla="val 8000"/>
+            </a:avLst>
+          </a:prstGeom>
+          <a:solidFill>
+            <a:srgbClr val="EEF4F0"/>
+          </a:solidFill>
+          <a:ln>
+            <a:noFill/>
+          </a:ln>
+          <a:effectLst/>
+        </p:spPr>
+        <p:style>
+          <a:lnRef idx="1">
+            <a:schemeClr val="accent1"/>
+          </a:lnRef>
+          <a:fillRef idx="3">
+            <a:schemeClr val="accent1"/>
+          </a:fillRef>
+          <a:effectRef idx="2">
+            <a:schemeClr val="accent1"/>
+          </a:effectRef>
+          <a:fontRef idx="minor">
+            <a:schemeClr val="lt1"/>
+          </a:fontRef>
+        </p:style>
+        <p:txBody>
+          <a:bodyPr rtlCol="0" anchor="ctr"/>
+          <a:lstStyle/>
+          <a:p>
+            <a:pPr algn="ctr"/>
+          </a:p>
+        </p:txBody>
+      </p:sp>
+      <p:sp>
+        <p:nvSpPr>
+          <p:cNvPr id="9" name="Oval 8"/>
+          <p:cNvSpPr/>
+          <p:nvPr/>
+        </p:nvSpPr>
+        <p:spPr>
+          <a:xfrm>
+            <a:off x="731520" y="3154680"/>
+            <a:ext cx="502920" cy="502920"/>
+          </a:xfrm>
+          <a:prstGeom prst="ellipse">
+            <a:avLst/>
+          </a:prstGeom>
+          <a:solidFill>
+            <a:srgbClr val="1F5A47"/>
+          </a:solidFill>
+          <a:ln>
+            <a:noFill/>
+          </a:ln>
+          <a:effectLst/>
+        </p:spPr>
+        <p:style>
+          <a:lnRef idx="1">
+            <a:schemeClr val="accent1"/>
+          </a:lnRef>
+          <a:fillRef idx="3">
+            <a:schemeClr val="accent1"/>
+          </a:fillRef>
+          <a:effectRef idx="2">
+            <a:schemeClr val="accent1"/>
+          </a:effectRef>
+          <a:fontRef idx="minor">
+            <a:schemeClr val="lt1"/>
+          </a:fontRef>
+        </p:style>
+        <p:txBody>
+          <a:bodyPr rtlCol="0" anchor="ctr" lIns="0" rIns="0" tIns="0" bIns="0"/>
+          <a:lstStyle/>
+          <a:p>
+            <a:pPr algn="ctr"/>
+            <a:r>
+              <a:rPr sz="1600" b="1">
+                <a:solidFill>
+                  <a:srgbClr val="FFFFFF"/>
+                </a:solidFill>
+              </a:rPr>
+              <a:t>2</a:t>
+            </a:r>
+          </a:p>
+        </p:txBody>
+      </p:sp>
+      <p:sp>
+        <p:nvSpPr>
+          <p:cNvPr id="10" name="TextBox 9"/>
+          <p:cNvSpPr txBox="1"/>
+          <p:nvPr/>
+        </p:nvSpPr>
+        <p:spPr>
+          <a:xfrm>
+            <a:off x="1417320" y="3017520"/>
+            <a:ext cx="3749039" cy="777240"/>
+          </a:xfrm>
+          <a:prstGeom prst="rect">
+            <a:avLst/>
+          </a:prstGeom>
+          <a:noFill/>
+        </p:spPr>
+        <p:txBody>
+          <a:bodyPr wrap="square" lIns="0" rIns="0" tIns="0" bIns="0" anchor="ctr">
+            <a:spAutoFit/>
+          </a:bodyPr>
+          <a:lstStyle/>
+          <a:p>
+            <a:pPr algn="l"/>
+            <a:r>
+              <a:rPr sz="1600" b="1">
+                <a:solidFill>
+                  <a:srgbClr val="1F5A47"/>
+                </a:solidFill>
+              </a:rPr>
+              <a:t>考えを出し合い、つなぐ</a:t>
+            </a:r>
+          </a:p>
+          <a:p>
+            <a:pPr algn="l"/>
+            <a:r>
+              <a:rPr sz="1300" b="0">
+                <a:solidFill>
+                  <a:srgbClr val="1E2B27"/>
+                </a:solidFill>
+              </a:rPr>
+              <a:t>子供が黒板に考えを書き、全体で練り上げる</a:t>
+            </a:r>
+          </a:p>
+        </p:txBody>
+      </p:sp>
+      <p:sp>
+        <p:nvSpPr>
+          <p:cNvPr id="11" name="Rounded Rectangle 10"/>
+          <p:cNvSpPr/>
+          <p:nvPr/>
+        </p:nvSpPr>
+        <p:spPr>
+          <a:xfrm>
+            <a:off x="548640" y="3977639"/>
+            <a:ext cx="4754880" cy="868680"/>
+          </a:xfrm>
+          <a:prstGeom prst="roundRect">
+            <a:avLst>
+              <a:gd name="adj" fmla="val 8000"/>
+            </a:avLst>
+          </a:prstGeom>
+          <a:solidFill>
+            <a:srgbClr val="EEF4F0"/>
+          </a:solidFill>
+          <a:ln>
+            <a:noFill/>
+          </a:ln>
+          <a:effectLst/>
+        </p:spPr>
+        <p:style>
+          <a:lnRef idx="1">
+            <a:schemeClr val="accent1"/>
+          </a:lnRef>
+          <a:fillRef idx="3">
+            <a:schemeClr val="accent1"/>
+          </a:fillRef>
+          <a:effectRef idx="2">
+            <a:schemeClr val="accent1"/>
+          </a:effectRef>
+          <a:fontRef idx="minor">
+            <a:schemeClr val="lt1"/>
+          </a:fontRef>
+        </p:style>
+        <p:txBody>
+          <a:bodyPr rtlCol="0" anchor="ctr"/>
+          <a:lstStyle/>
+          <a:p>
+            <a:pPr algn="ctr"/>
+          </a:p>
+        </p:txBody>
+      </p:sp>
+      <p:sp>
+        <p:nvSpPr>
+          <p:cNvPr id="12" name="Oval 11"/>
+          <p:cNvSpPr/>
+          <p:nvPr/>
+        </p:nvSpPr>
+        <p:spPr>
+          <a:xfrm>
+            <a:off x="731520" y="4160520"/>
+            <a:ext cx="502920" cy="502920"/>
+          </a:xfrm>
+          <a:prstGeom prst="ellipse">
+            <a:avLst/>
+          </a:prstGeom>
+          <a:solidFill>
+            <a:srgbClr val="D9702C"/>
+          </a:solidFill>
+          <a:ln>
+            <a:noFill/>
+          </a:ln>
+          <a:effectLst/>
+        </p:spPr>
+        <p:style>
+          <a:lnRef idx="1">
+            <a:schemeClr val="accent1"/>
+          </a:lnRef>
+          <a:fillRef idx="3">
+            <a:schemeClr val="accent1"/>
+          </a:fillRef>
+          <a:effectRef idx="2">
+            <a:schemeClr val="accent1"/>
+          </a:effectRef>
+          <a:fontRef idx="minor">
+            <a:schemeClr val="lt1"/>
+          </a:fontRef>
+        </p:style>
+        <p:txBody>
+          <a:bodyPr rtlCol="0" anchor="ctr" lIns="0" rIns="0" tIns="0" bIns="0"/>
+          <a:lstStyle/>
+          <a:p>
+            <a:pPr algn="ctr"/>
+            <a:r>
+              <a:rPr sz="1600" b="1">
+                <a:solidFill>
+                  <a:srgbClr val="FFFFFF"/>
+                </a:solidFill>
+              </a:rPr>
+              <a:t>3</a:t>
+            </a:r>
+          </a:p>
+        </p:txBody>
+      </p:sp>
+      <p:sp>
+        <p:nvSpPr>
+          <p:cNvPr id="13" name="TextBox 12"/>
+          <p:cNvSpPr txBox="1"/>
+          <p:nvPr/>
+        </p:nvSpPr>
+        <p:spPr>
+          <a:xfrm>
+            <a:off x="1417320" y="4023359"/>
+            <a:ext cx="3749039" cy="777240"/>
+          </a:xfrm>
+          <a:prstGeom prst="rect">
+            <a:avLst/>
+          </a:prstGeom>
+          <a:noFill/>
+        </p:spPr>
+        <p:txBody>
+          <a:bodyPr wrap="square" lIns="0" rIns="0" tIns="0" bIns="0" anchor="ctr">
+            <a:spAutoFit/>
+          </a:bodyPr>
+          <a:lstStyle/>
+          <a:p>
+            <a:pPr algn="l"/>
+            <a:r>
+              <a:rPr sz="1600" b="1">
+                <a:solidFill>
+                  <a:srgbClr val="1F5A47"/>
+                </a:solidFill>
+              </a:rPr>
+              <a:t>任せる２割を支える</a:t>
+            </a:r>
+          </a:p>
+          <a:p>
+            <a:pPr algn="l"/>
+            <a:r>
+              <a:rPr sz="1300" b="0">
+                <a:solidFill>
+                  <a:srgbClr val="1E2B27"/>
+                </a:solidFill>
+              </a:rPr>
+              <a:t>身に付けた学び方がMP学習・FSPで生きる</a:t>
+            </a:r>
+          </a:p>
+        </p:txBody>
+      </p:sp>
+      <p:sp>
+        <p:nvSpPr>
+          <p:cNvPr id="14" name="Rounded Rectangle 13"/>
+          <p:cNvSpPr/>
+          <p:nvPr/>
+        </p:nvSpPr>
+        <p:spPr>
+          <a:xfrm>
+            <a:off x="548640" y="5029200"/>
+            <a:ext cx="4754880" cy="1051560"/>
+          </a:xfrm>
+          <a:prstGeom prst="roundRect">
+            <a:avLst>
+              <a:gd name="adj" fmla="val 8000"/>
+            </a:avLst>
+          </a:prstGeom>
+          <a:solidFill>
+            <a:srgbClr val="1F5A47"/>
+          </a:solidFill>
+          <a:ln>
+            <a:noFill/>
+          </a:ln>
+          <a:effectLst/>
+        </p:spPr>
+        <p:style>
+          <a:lnRef idx="1">
+            <a:schemeClr val="accent1"/>
+          </a:lnRef>
+          <a:fillRef idx="3">
+            <a:schemeClr val="accent1"/>
+          </a:fillRef>
+          <a:effectRef idx="2">
+            <a:schemeClr val="accent1"/>
+          </a:effectRef>
+          <a:fontRef idx="minor">
+            <a:schemeClr val="lt1"/>
+          </a:fontRef>
+        </p:style>
+        <p:txBody>
+          <a:bodyPr rtlCol="0" anchor="ctr"/>
+          <a:lstStyle/>
+          <a:p>
+            <a:pPr algn="ctr"/>
+          </a:p>
+        </p:txBody>
+      </p:sp>
+      <p:sp>
+        <p:nvSpPr>
+          <p:cNvPr id="15" name="TextBox 14"/>
+          <p:cNvSpPr txBox="1"/>
+          <p:nvPr/>
+        </p:nvSpPr>
+        <p:spPr>
+          <a:xfrm>
+            <a:off x="777240" y="5029200"/>
+            <a:ext cx="4297680" cy="1051560"/>
+          </a:xfrm>
+          <a:prstGeom prst="rect">
+            <a:avLst/>
+          </a:prstGeom>
+          <a:noFill/>
+        </p:spPr>
+        <p:txBody>
+          <a:bodyPr wrap="square" lIns="0" rIns="0" tIns="0" bIns="0" anchor="ctr">
+            <a:spAutoFit/>
+          </a:bodyPr>
+          <a:lstStyle/>
+          <a:p>
+            <a:pPr algn="l"/>
+            <a:r>
+              <a:rPr sz="1700" b="1">
+                <a:solidFill>
+                  <a:srgbClr val="FFFFFF"/>
+                </a:solidFill>
+              </a:rPr>
+              <a:t>子供に任せる２割は、</a:t>
+            </a:r>
+          </a:p>
+          <a:p>
+            <a:pPr algn="l"/>
+            <a:r>
+              <a:rPr sz="1700" b="1">
+                <a:solidFill>
+                  <a:srgbClr val="FBEADB"/>
+                </a:solidFill>
+              </a:rPr>
+              <a:t>８割の普段の授業が支えている</a:t>
+            </a:r>
+          </a:p>
+        </p:txBody>
+      </p:sp>
+      <p:pic>
+        <p:nvPicPr>
+          <p:cNvPr id="16" name="写真 IMG_0320.JPG" descr="IMG_0320.JPG"/>
+          <p:cNvPicPr>
+            <a:picLocks noChangeAspect="1"/>
+          </p:cNvPicPr>
+          <p:nvPr/>
+        </p:nvPicPr>
+        <p:blipFill>
+          <a:blip r:embed="rId2"/>
+          <a:srcRect t="126" b="126"/>
+          <a:stretch>
+            <a:fillRect/>
+          </a:stretch>
+        </p:blipFill>
+        <p:spPr>
+          <a:xfrm>
+            <a:off x="5577840" y="1508760"/>
+            <a:ext cx="2964027" cy="2217420"/>
+          </a:xfrm>
+          <a:prstGeom prst="rect">
+            <a:avLst/>
+          </a:prstGeom>
+        </p:spPr>
+      </p:pic>
+      <p:pic>
+        <p:nvPicPr>
+          <p:cNvPr id="17" name="写真 IMG_0318.JPG" descr="IMG_0318.JPG"/>
+          <p:cNvPicPr>
+            <a:picLocks noChangeAspect="1"/>
+          </p:cNvPicPr>
+          <p:nvPr/>
+        </p:nvPicPr>
+        <p:blipFill>
+          <a:blip r:embed="rId3"/>
+          <a:srcRect t="126" b="126"/>
+          <a:stretch>
+            <a:fillRect/>
+          </a:stretch>
+        </p:blipFill>
+        <p:spPr>
+          <a:xfrm>
+            <a:off x="8679027" y="1508760"/>
+            <a:ext cx="2964027" cy="2217420"/>
+          </a:xfrm>
+          <a:prstGeom prst="rect">
+            <a:avLst/>
+          </a:prstGeom>
+        </p:spPr>
+      </p:pic>
+      <p:pic>
+        <p:nvPicPr>
+          <p:cNvPr id="18" name="写真 IMG_0268.JPG" descr="IMG_0268.JPG"/>
+          <p:cNvPicPr>
+            <a:picLocks noChangeAspect="1"/>
+          </p:cNvPicPr>
+          <p:nvPr/>
+        </p:nvPicPr>
+        <p:blipFill>
+          <a:blip r:embed="rId4"/>
+          <a:srcRect b="252"/>
+          <a:stretch>
+            <a:fillRect/>
+          </a:stretch>
+        </p:blipFill>
+        <p:spPr>
+          <a:xfrm>
+            <a:off x="5577840" y="3863339"/>
+            <a:ext cx="2964027" cy="2217420"/>
+          </a:xfrm>
+          <a:prstGeom prst="rect">
+            <a:avLst/>
+          </a:prstGeom>
+        </p:spPr>
+      </p:pic>
+      <p:pic>
+        <p:nvPicPr>
+          <p:cNvPr id="19" name="写真 IMG_0270.JPG" descr="IMG_0270.JPG"/>
+          <p:cNvPicPr>
+            <a:picLocks noChangeAspect="1"/>
+          </p:cNvPicPr>
+          <p:nvPr/>
+        </p:nvPicPr>
+        <p:blipFill>
+          <a:blip r:embed="rId5"/>
+          <a:srcRect t="126" b="126"/>
+          <a:stretch>
+            <a:fillRect/>
+          </a:stretch>
+        </p:blipFill>
+        <p:spPr>
+          <a:xfrm>
+            <a:off x="8679027" y="3863339"/>
+            <a:ext cx="2964027" cy="2217420"/>
+          </a:xfrm>
+          <a:prstGeom prst="rect">
+            <a:avLst/>
+          </a:prstGeom>
+        </p:spPr>
+      </p:pic>
+    </p:spTree>
+  </p:cSld>
+  <p:clrMapOvr>
+    <a:masterClrMapping/>
+  </p:clrMapOvr>
+</p:sld>
+</file>
+
+<file path=ppt/slides/slide8.xml><?xml version="1.0" encoding="utf-8"?>
 <p:sld xmlns:a="http://schemas.openxmlformats.org/drawingml/2006/main" xmlns:r="http://schemas.openxmlformats.org/officeDocument/2006/relationships" xmlns:p="http://schemas.openxmlformats.org/presentationml/2006/main">
   <p:cSld name="Slide 8">
     <p:spTree>
@@ -18769,7 +19680,7 @@
 </p:sld>
 </file>
 
-<file path=ppt/slides/slide8.xml><?xml version="1.0" encoding="utf-8"?>
+<file path=ppt/slides/slide9.xml><?xml version="1.0" encoding="utf-8"?>
 <p:sld xmlns:a="http://schemas.openxmlformats.org/drawingml/2006/main" xmlns:r="http://schemas.openxmlformats.org/officeDocument/2006/relationships" xmlns:p="http://schemas.openxmlformats.org/presentationml/2006/main">
   <p:cSld name="Slide 9">
     <p:spTree>
@@ -18860,7 +19771,7 @@
                   <a:schemeClr val="tx2"/>
                 </a:solidFill>
               </a:rPr>
-              <a:t>学校全体を学習空間に／自分でくらしをつくる</a:t>
+              <a:t>学校全体を学習空間に</a:t>
             </a:r>
             <a:endParaRPr lang="en-US" sz="3000" dirty="0"/>
           </a:p>
@@ -19159,67 +20070,25 @@
           </a:prstGeom>
         </p:spPr>
       </p:pic>
-      <p:sp>
-        <p:nvSpPr>
-          <p:cNvPr id="29" name="TextBox 28"/>
-          <p:cNvSpPr txBox="1"/>
-          <p:nvPr/>
-        </p:nvSpPr>
-        <p:spPr>
-          <a:xfrm>
-            <a:off x="548640" y="3794760"/>
-            <a:ext cx="6949440" cy="320040"/>
-          </a:xfrm>
-          <a:prstGeom prst="rect">
-            <a:avLst/>
-          </a:prstGeom>
-          <a:noFill/>
-        </p:spPr>
-        <p:txBody>
-          <a:bodyPr wrap="square" lIns="0" rIns="0" tIns="0" bIns="0" anchor="ctr">
-            <a:spAutoFit/>
-          </a:bodyPr>
-          <a:lstStyle/>
-          <a:p>
-            <a:pPr algn="l"/>
-            <a:r>
-              <a:rPr sz="1500" b="1">
-                <a:solidFill>
-                  <a:srgbClr val="D9702C"/>
-                </a:solidFill>
-              </a:rPr>
-              <a:t>買い物学習施設「サンピュア」　</a:t>
-            </a:r>
-            <a:r>
-              <a:rPr sz="1400" b="0">
-                <a:solidFill>
-                  <a:srgbClr val="1E2B27"/>
-                </a:solidFill>
-              </a:rPr>
-              <a:t>商品選択・注文・会計・ごみ分別・清掃まで体験</a:t>
-            </a:r>
-          </a:p>
-        </p:txBody>
-      </p:sp>
       <p:pic>
         <p:nvPicPr>
-          <p:cNvPr id="30" name="写真 IMG_0221.JPG" descr="IMG_0221.JPG"/>
+          <p:cNvPr id="29" name="写真 IMG_0145.JPG" descr="IMG_0145.JPG"/>
           <p:cNvPicPr>
             <a:picLocks noChangeAspect="1"/>
           </p:cNvPicPr>
           <p:nvPr/>
         </p:nvPicPr>
         <p:blipFill>
-          <a:blip r:embed="rId11"/>
-          <a:srcRect l="5488" r="5488"/>
+          <a:blip r:embed="rId14"/>
+          <a:srcRect l="11170" r="11170"/>
           <a:stretch>
             <a:fillRect/>
           </a:stretch>
         </p:blipFill>
         <p:spPr>
           <a:xfrm>
-            <a:off x="548640" y="4206240"/>
-            <a:ext cx="2225040" cy="1874520"/>
+            <a:off x="548640" y="3931920"/>
+            <a:ext cx="2225040" cy="2148840"/>
           </a:xfrm>
           <a:prstGeom prst="rect">
             <a:avLst/>
@@ -19228,23 +20097,23 @@
       </p:pic>
       <p:pic>
         <p:nvPicPr>
-          <p:cNvPr id="31" name="写真 IMG_0284.JPG" descr="IMG_0284.JPG"/>
+          <p:cNvPr id="30" name="写真 IMG_0288.JPG" descr="IMG_0288.JPG"/>
           <p:cNvPicPr>
             <a:picLocks noChangeAspect="1"/>
           </p:cNvPicPr>
           <p:nvPr/>
         </p:nvPicPr>
         <p:blipFill>
-          <a:blip r:embed="rId12"/>
-          <a:srcRect l="5488" r="5488"/>
+          <a:blip r:embed="rId15"/>
+          <a:srcRect l="11170" r="11170"/>
           <a:stretch>
             <a:fillRect/>
           </a:stretch>
         </p:blipFill>
         <p:spPr>
           <a:xfrm>
-            <a:off x="2910840" y="4206240"/>
-            <a:ext cx="2225040" cy="1874520"/>
+            <a:off x="2910840" y="3931920"/>
+            <a:ext cx="2225040" cy="2148840"/>
           </a:xfrm>
           <a:prstGeom prst="rect">
             <a:avLst/>
@@ -19253,934 +20122,23 @@
       </p:pic>
       <p:pic>
         <p:nvPicPr>
-          <p:cNvPr id="32" name="写真 IMG_0235.JPG" descr="IMG_0235.JPG"/>
+          <p:cNvPr id="31" name="写真 IMG_0123.JPG" descr="image.JPG"/>
           <p:cNvPicPr>
             <a:picLocks noChangeAspect="1"/>
           </p:cNvPicPr>
           <p:nvPr/>
         </p:nvPicPr>
         <p:blipFill>
-          <a:blip r:embed="rId13"/>
-          <a:srcRect l="488" r="10488"/>
+          <a:blip r:embed="rId8"/>
+          <a:srcRect l="1170" r="21170"/>
           <a:stretch>
             <a:fillRect/>
           </a:stretch>
         </p:blipFill>
         <p:spPr>
           <a:xfrm>
-            <a:off x="5273039" y="4206240"/>
-            <a:ext cx="2225040" cy="1874520"/>
-          </a:xfrm>
-          <a:prstGeom prst="rect">
-            <a:avLst/>
-          </a:prstGeom>
-        </p:spPr>
-      </p:pic>
-    </p:spTree>
-  </p:cSld>
-  <p:clrMapOvr>
-    <a:masterClrMapping/>
-  </p:clrMapOvr>
-</p:sld>
-</file>
-
-<file path=ppt/slides/slide9.xml><?xml version="1.0" encoding="utf-8"?>
-<p:sld xmlns:a="http://schemas.openxmlformats.org/drawingml/2006/main" xmlns:r="http://schemas.openxmlformats.org/officeDocument/2006/relationships" xmlns:p="http://schemas.openxmlformats.org/presentationml/2006/main">
-  <p:cSld name="Slide 6">
-    <p:spTree>
-      <p:nvGrpSpPr>
-        <p:cNvPr id="1" name=""/>
-        <p:cNvGrpSpPr/>
-        <p:nvPr/>
-      </p:nvGrpSpPr>
-      <p:grpSpPr>
-        <a:xfrm>
-          <a:off x="0" y="0"/>
-          <a:ext cx="0" cy="0"/>
-          <a:chOff x="0" y="0"/>
-          <a:chExt cx="0" cy="0"/>
-        </a:xfrm>
-      </p:grpSpPr>
-      <p:sp>
-        <p:nvSpPr>
-          <p:cNvPr id="2" name="Text 0"/>
-          <p:cNvSpPr>
-            <a:spLocks noGrp="1"/>
-          </p:cNvSpPr>
-          <p:nvPr>
-            <p:ph type="body" idx="100" hasCustomPrompt="1"/>
-          </p:nvPr>
-        </p:nvSpPr>
-        <p:spPr>
-          <a:xfrm>
-            <a:off x="548640" y="320040"/>
-            <a:ext cx="11094415" cy="320040"/>
-          </a:xfrm>
-          <a:prstGeom prst="rect">
-            <a:avLst/>
-          </a:prstGeom>
-          <a:noFill/>
-          <a:ln/>
-        </p:spPr>
-        <p:txBody>
-          <a:bodyPr wrap="square" lIns="0" tIns="0" rIns="0" bIns="0" rtlCol="0" anchor="ctr"/>
-          <a:lstStyle/>
-          <a:p>
-            <a:pPr marL="0" indent="0">
-              <a:buNone/>
-            </a:pPr>
-            <a:r>
-              <a:rPr lang="en-US" sz="1300" b="1" dirty="0">
-                <a:solidFill>
-                  <a:schemeClr val="accent2"/>
-                </a:solidFill>
-              </a:rPr>
-              <a:t>01　天童中部小学校の取組</a:t>
-            </a:r>
-            <a:endParaRPr lang="en-US" sz="1300" dirty="0"/>
-          </a:p>
-        </p:txBody>
-      </p:sp>
-      <p:sp>
-        <p:nvSpPr>
-          <p:cNvPr id="3" name="Text 0"/>
-          <p:cNvSpPr>
-            <a:spLocks noGrp="1"/>
-          </p:cNvSpPr>
-          <p:nvPr>
-            <p:ph type="title" idx="101" hasCustomPrompt="1"/>
-          </p:nvPr>
-        </p:nvSpPr>
-        <p:spPr>
-          <a:xfrm>
-            <a:off x="548640" y="658368"/>
-            <a:ext cx="11094415" cy="685800"/>
-          </a:xfrm>
-          <a:prstGeom prst="rect">
-            <a:avLst/>
-          </a:prstGeom>
-          <a:noFill/>
-          <a:ln/>
-        </p:spPr>
-        <p:txBody>
-          <a:bodyPr wrap="square" lIns="0" tIns="0" rIns="0" bIns="0" rtlCol="0" anchor="ctr"/>
-          <a:lstStyle/>
-          <a:p>
-            <a:pPr marL="0" indent="0" algn="l">
-              <a:buNone/>
-            </a:pPr>
-            <a:r>
-              <a:rPr lang="en-US" sz="3000" b="1" dirty="0">
-                <a:solidFill>
-                  <a:schemeClr val="tx2"/>
-                </a:solidFill>
-              </a:rPr>
-              <a:t>マイプラン学習（MP学習）</a:t>
-            </a:r>
-            <a:endParaRPr lang="en-US" sz="3000" dirty="0"/>
-          </a:p>
-        </p:txBody>
-      </p:sp>
-      <p:sp>
-        <p:nvSpPr>
-          <p:cNvPr id="5" name="Text 3"/>
-          <p:cNvSpPr txBox="1"/>
-          <p:nvPr/>
-        </p:nvSpPr>
-        <p:spPr>
-          <a:xfrm>
-            <a:off x="548640" y="1508760"/>
-            <a:ext cx="6949440" cy="320040"/>
-          </a:xfrm>
-          <a:prstGeom prst="rect">
-            <a:avLst/>
-          </a:prstGeom>
-          <a:noFill/>
-          <a:ln/>
-        </p:spPr>
-        <p:txBody>
-          <a:bodyPr wrap="square" lIns="0" tIns="0" rIns="0" bIns="0" rtlCol="0" anchor="ctr"/>
-          <a:lstStyle/>
-          <a:p>
-            <a:pPr marL="0" indent="0">
-              <a:buNone/>
-            </a:pPr>
-            <a:r>
-              <a:rPr lang="en-US" sz="1400" dirty="0">
-                <a:solidFill>
-                  <a:schemeClr val="accent5"/>
-                </a:solidFill>
-              </a:rPr>
-              <a:t>単に進度を自由にする学習ではなく ――</a:t>
-            </a:r>
-            <a:endParaRPr lang="en-US" sz="1400" dirty="0"/>
-          </a:p>
-        </p:txBody>
-      </p:sp>
-      <p:sp>
-        <p:nvSpPr>
-          <p:cNvPr id="6" name="Shape 4"/>
-          <p:cNvSpPr/>
-          <p:nvPr/>
-        </p:nvSpPr>
-        <p:spPr>
-          <a:xfrm>
-            <a:off x="548640" y="1874520"/>
-            <a:ext cx="6949440" cy="777240"/>
-          </a:xfrm>
-          <a:prstGeom prst="roundRect">
-            <a:avLst>
-              <a:gd name="adj" fmla="val 9412"/>
-            </a:avLst>
-          </a:prstGeom>
-          <a:solidFill>
-            <a:schemeClr val="tx2"/>
-          </a:solidFill>
-          <a:ln/>
-        </p:spPr>
-        <p:txBody>
-          <a:bodyPr/>
-          <a:lstStyle/>
-          <a:p>
-            <a:endParaRPr lang="ja-JP" altLang="en-US"/>
-          </a:p>
-        </p:txBody>
-      </p:sp>
-      <p:sp>
-        <p:nvSpPr>
-          <p:cNvPr id="7" name="Text 5"/>
-          <p:cNvSpPr txBox="1"/>
-          <p:nvPr/>
-        </p:nvSpPr>
-        <p:spPr>
-          <a:xfrm>
-            <a:off x="777240" y="1874520"/>
-            <a:ext cx="6492240" cy="777240"/>
-          </a:xfrm>
-          <a:prstGeom prst="rect">
-            <a:avLst/>
-          </a:prstGeom>
-          <a:noFill/>
-          <a:ln/>
-        </p:spPr>
-        <p:txBody>
-          <a:bodyPr wrap="square" lIns="0" tIns="0" rIns="0" bIns="0" rtlCol="0" anchor="ctr"/>
-          <a:lstStyle/>
-          <a:p>
-            <a:pPr marL="0" indent="0" algn="ctr">
-              <a:buNone/>
-            </a:pPr>
-            <a:r>
-              <a:rPr lang="en-US" sz="1700" b="1" dirty="0">
-                <a:solidFill>
-                  <a:schemeClr val="bg1"/>
-                </a:solidFill>
-              </a:rPr>
-              <a:t>学習のゴールに向かって、自分で計画を立て、</a:t>
-            </a:r>
-            <a:endParaRPr lang="en-US" sz="1700" dirty="0"/>
-          </a:p>
-          <a:p>
-            <a:pPr marL="0" indent="0" algn="ctr">
-              <a:buNone/>
-            </a:pPr>
-            <a:r>
-              <a:rPr lang="en-US" sz="1700" b="1" dirty="0">
-                <a:solidFill>
-                  <a:schemeClr val="bg1"/>
-                </a:solidFill>
-              </a:rPr>
-              <a:t>調整しながら学ぶ学習</a:t>
-            </a:r>
-            <a:endParaRPr lang="en-US" sz="1700" dirty="0"/>
-          </a:p>
-        </p:txBody>
-      </p:sp>
-      <p:sp>
-        <p:nvSpPr>
-          <p:cNvPr id="8" name="Shape 6"/>
-          <p:cNvSpPr/>
-          <p:nvPr/>
-        </p:nvSpPr>
-        <p:spPr>
-          <a:xfrm>
-            <a:off x="548640" y="2834640"/>
-            <a:ext cx="1463040" cy="640080"/>
-          </a:xfrm>
-          <a:prstGeom prst="roundRect">
-            <a:avLst>
-              <a:gd name="adj" fmla="val 11429"/>
-            </a:avLst>
-          </a:prstGeom>
-          <a:solidFill>
-            <a:schemeClr val="bg2"/>
-          </a:solidFill>
-          <a:ln/>
-        </p:spPr>
-        <p:txBody>
-          <a:bodyPr/>
-          <a:lstStyle/>
-          <a:p>
-            <a:endParaRPr lang="ja-JP" altLang="en-US"/>
-          </a:p>
-        </p:txBody>
-      </p:sp>
-      <p:sp>
-        <p:nvSpPr>
-          <p:cNvPr id="9" name="Text 7"/>
-          <p:cNvSpPr txBox="1"/>
-          <p:nvPr/>
-        </p:nvSpPr>
-        <p:spPr>
-          <a:xfrm>
-            <a:off x="548640" y="2834640"/>
-            <a:ext cx="1463040" cy="640080"/>
-          </a:xfrm>
-          <a:prstGeom prst="rect">
-            <a:avLst/>
-          </a:prstGeom>
-          <a:noFill/>
-          <a:ln/>
-        </p:spPr>
-        <p:txBody>
-          <a:bodyPr wrap="square" lIns="0" tIns="0" rIns="0" bIns="0" rtlCol="0" anchor="ctr"/>
-          <a:lstStyle/>
-          <a:p>
-            <a:pPr marL="0" indent="0" algn="ctr">
-              <a:buNone/>
-            </a:pPr>
-            <a:r>
-              <a:rPr lang="en-US" sz="1700" b="1" dirty="0">
-                <a:solidFill>
-                  <a:schemeClr val="tx2"/>
-                </a:solidFill>
-              </a:rPr>
-              <a:t>計画する</a:t>
-            </a:r>
-            <a:endParaRPr lang="en-US" sz="1700" dirty="0"/>
-          </a:p>
-        </p:txBody>
-      </p:sp>
-      <p:pic>
-        <p:nvPicPr>
-          <p:cNvPr id="10" name="Image 0" descr="preencoded.png"/>
-          <p:cNvPicPr>
-            <a:picLocks noChangeAspect="1"/>
-          </p:cNvPicPr>
-          <p:nvPr/>
-        </p:nvPicPr>
-        <p:blipFill>
-          <a:blip r:embed="rId3"/>
-          <a:stretch>
-            <a:fillRect/>
-          </a:stretch>
-        </p:blipFill>
-        <p:spPr>
-          <a:xfrm>
-            <a:off x="2075688" y="3035808"/>
-            <a:ext cx="237744" cy="237744"/>
-          </a:xfrm>
-          <a:prstGeom prst="rect">
-            <a:avLst/>
-          </a:prstGeom>
-        </p:spPr>
-      </p:pic>
-      <p:sp>
-        <p:nvSpPr>
-          <p:cNvPr id="11" name="Shape 8"/>
-          <p:cNvSpPr/>
-          <p:nvPr/>
-        </p:nvSpPr>
-        <p:spPr>
-          <a:xfrm>
-            <a:off x="2377440" y="2834640"/>
-            <a:ext cx="1463040" cy="640080"/>
-          </a:xfrm>
-          <a:prstGeom prst="roundRect">
-            <a:avLst>
-              <a:gd name="adj" fmla="val 11429"/>
-            </a:avLst>
-          </a:prstGeom>
-          <a:solidFill>
-            <a:schemeClr val="bg2"/>
-          </a:solidFill>
-          <a:ln/>
-        </p:spPr>
-        <p:txBody>
-          <a:bodyPr/>
-          <a:lstStyle/>
-          <a:p>
-            <a:endParaRPr lang="ja-JP" altLang="en-US"/>
-          </a:p>
-        </p:txBody>
-      </p:sp>
-      <p:sp>
-        <p:nvSpPr>
-          <p:cNvPr id="12" name="Text 9"/>
-          <p:cNvSpPr txBox="1"/>
-          <p:nvPr/>
-        </p:nvSpPr>
-        <p:spPr>
-          <a:xfrm>
-            <a:off x="2377440" y="2834640"/>
-            <a:ext cx="1463040" cy="640080"/>
-          </a:xfrm>
-          <a:prstGeom prst="rect">
-            <a:avLst/>
-          </a:prstGeom>
-          <a:noFill/>
-          <a:ln/>
-        </p:spPr>
-        <p:txBody>
-          <a:bodyPr wrap="square" lIns="0" tIns="0" rIns="0" bIns="0" rtlCol="0" anchor="ctr"/>
-          <a:lstStyle/>
-          <a:p>
-            <a:pPr marL="0" indent="0" algn="ctr">
-              <a:buNone/>
-            </a:pPr>
-            <a:r>
-              <a:rPr lang="en-US" sz="1700" b="1" dirty="0">
-                <a:solidFill>
-                  <a:schemeClr val="tx2"/>
-                </a:solidFill>
-              </a:rPr>
-              <a:t>学ぶ</a:t>
-            </a:r>
-            <a:endParaRPr lang="en-US" sz="1700" dirty="0"/>
-          </a:p>
-        </p:txBody>
-      </p:sp>
-      <p:pic>
-        <p:nvPicPr>
-          <p:cNvPr id="13" name="Image 1" descr="preencoded.png"/>
-          <p:cNvPicPr>
-            <a:picLocks noChangeAspect="1"/>
-          </p:cNvPicPr>
-          <p:nvPr/>
-        </p:nvPicPr>
-        <p:blipFill>
-          <a:blip r:embed="rId3"/>
-          <a:stretch>
-            <a:fillRect/>
-          </a:stretch>
-        </p:blipFill>
-        <p:spPr>
-          <a:xfrm>
-            <a:off x="3904488" y="3035808"/>
-            <a:ext cx="237744" cy="237744"/>
-          </a:xfrm>
-          <a:prstGeom prst="rect">
-            <a:avLst/>
-          </a:prstGeom>
-        </p:spPr>
-      </p:pic>
-      <p:sp>
-        <p:nvSpPr>
-          <p:cNvPr id="14" name="Shape 10"/>
-          <p:cNvSpPr/>
-          <p:nvPr/>
-        </p:nvSpPr>
-        <p:spPr>
-          <a:xfrm>
-            <a:off x="4206240" y="2834640"/>
-            <a:ext cx="1463040" cy="640080"/>
-          </a:xfrm>
-          <a:prstGeom prst="roundRect">
-            <a:avLst>
-              <a:gd name="adj" fmla="val 11429"/>
-            </a:avLst>
-          </a:prstGeom>
-          <a:solidFill>
-            <a:schemeClr val="bg2"/>
-          </a:solidFill>
-          <a:ln/>
-        </p:spPr>
-        <p:txBody>
-          <a:bodyPr/>
-          <a:lstStyle/>
-          <a:p>
-            <a:endParaRPr lang="ja-JP" altLang="en-US"/>
-          </a:p>
-        </p:txBody>
-      </p:sp>
-      <p:sp>
-        <p:nvSpPr>
-          <p:cNvPr id="15" name="Text 11"/>
-          <p:cNvSpPr txBox="1"/>
-          <p:nvPr/>
-        </p:nvSpPr>
-        <p:spPr>
-          <a:xfrm>
-            <a:off x="4206240" y="2834640"/>
-            <a:ext cx="1463040" cy="640080"/>
-          </a:xfrm>
-          <a:prstGeom prst="rect">
-            <a:avLst/>
-          </a:prstGeom>
-          <a:noFill/>
-          <a:ln/>
-        </p:spPr>
-        <p:txBody>
-          <a:bodyPr wrap="square" lIns="0" tIns="0" rIns="0" bIns="0" rtlCol="0" anchor="ctr"/>
-          <a:lstStyle/>
-          <a:p>
-            <a:pPr marL="0" indent="0" algn="ctr">
-              <a:buNone/>
-            </a:pPr>
-            <a:r>
-              <a:rPr lang="en-US" sz="1700" b="1" dirty="0">
-                <a:solidFill>
-                  <a:schemeClr val="tx2"/>
-                </a:solidFill>
-              </a:rPr>
-              <a:t>振り返る</a:t>
-            </a:r>
-            <a:endParaRPr lang="en-US" sz="1700" dirty="0"/>
-          </a:p>
-        </p:txBody>
-      </p:sp>
-      <p:pic>
-        <p:nvPicPr>
-          <p:cNvPr id="16" name="Image 2" descr="preencoded.png"/>
-          <p:cNvPicPr>
-            <a:picLocks noChangeAspect="1"/>
-          </p:cNvPicPr>
-          <p:nvPr/>
-        </p:nvPicPr>
-        <p:blipFill>
-          <a:blip r:embed="rId3"/>
-          <a:stretch>
-            <a:fillRect/>
-          </a:stretch>
-        </p:blipFill>
-        <p:spPr>
-          <a:xfrm>
-            <a:off x="5733288" y="3035808"/>
-            <a:ext cx="237744" cy="237744"/>
-          </a:xfrm>
-          <a:prstGeom prst="rect">
-            <a:avLst/>
-          </a:prstGeom>
-        </p:spPr>
-      </p:pic>
-      <p:sp>
-        <p:nvSpPr>
-          <p:cNvPr id="17" name="Shape 12"/>
-          <p:cNvSpPr/>
-          <p:nvPr/>
-        </p:nvSpPr>
-        <p:spPr>
-          <a:xfrm>
-            <a:off x="6035040" y="2834640"/>
-            <a:ext cx="1463040" cy="640080"/>
-          </a:xfrm>
-          <a:prstGeom prst="roundRect">
-            <a:avLst>
-              <a:gd name="adj" fmla="val 11429"/>
-            </a:avLst>
-          </a:prstGeom>
-          <a:solidFill>
-            <a:schemeClr val="accent4"/>
-          </a:solidFill>
-          <a:ln/>
-        </p:spPr>
-        <p:txBody>
-          <a:bodyPr/>
-          <a:lstStyle/>
-          <a:p>
-            <a:endParaRPr lang="ja-JP" altLang="en-US"/>
-          </a:p>
-        </p:txBody>
-      </p:sp>
-      <p:sp>
-        <p:nvSpPr>
-          <p:cNvPr id="18" name="Text 13"/>
-          <p:cNvSpPr txBox="1"/>
-          <p:nvPr/>
-        </p:nvSpPr>
-        <p:spPr>
-          <a:xfrm>
-            <a:off x="6035040" y="2834640"/>
-            <a:ext cx="1463040" cy="640080"/>
-          </a:xfrm>
-          <a:prstGeom prst="rect">
-            <a:avLst/>
-          </a:prstGeom>
-          <a:noFill/>
-          <a:ln/>
-        </p:spPr>
-        <p:txBody>
-          <a:bodyPr wrap="square" lIns="0" tIns="0" rIns="0" bIns="0" rtlCol="0" anchor="ctr"/>
-          <a:lstStyle/>
-          <a:p>
-            <a:pPr marL="0" indent="0" algn="ctr">
-              <a:buNone/>
-            </a:pPr>
-            <a:r>
-              <a:rPr lang="en-US" sz="1700" b="1" dirty="0">
-                <a:solidFill>
-                  <a:schemeClr val="tx2"/>
-                </a:solidFill>
-              </a:rPr>
-              <a:t>調整する</a:t>
-            </a:r>
-            <a:endParaRPr lang="en-US" sz="1700" dirty="0"/>
-          </a:p>
-        </p:txBody>
-      </p:sp>
-      <p:sp>
-        <p:nvSpPr>
-          <p:cNvPr id="19" name="Shape 14"/>
-          <p:cNvSpPr/>
-          <p:nvPr/>
-        </p:nvSpPr>
-        <p:spPr>
-          <a:xfrm>
-            <a:off x="548640" y="3703320"/>
-            <a:ext cx="3017520" cy="1051560"/>
-          </a:xfrm>
-          <a:prstGeom prst="roundRect">
-            <a:avLst>
-              <a:gd name="adj" fmla="val 6957"/>
-            </a:avLst>
-          </a:prstGeom>
-          <a:solidFill>
-            <a:schemeClr val="bg2"/>
-          </a:solidFill>
-          <a:ln/>
-        </p:spPr>
-        <p:txBody>
-          <a:bodyPr/>
-          <a:lstStyle/>
-          <a:p>
-            <a:endParaRPr lang="ja-JP" altLang="en-US"/>
-          </a:p>
-        </p:txBody>
-      </p:sp>
-      <p:sp>
-        <p:nvSpPr>
-          <p:cNvPr id="20" name="Text 15"/>
-          <p:cNvSpPr txBox="1"/>
-          <p:nvPr/>
-        </p:nvSpPr>
-        <p:spPr>
-          <a:xfrm>
-            <a:off x="731520" y="3703320"/>
-            <a:ext cx="2651760" cy="1051560"/>
-          </a:xfrm>
-          <a:prstGeom prst="rect">
-            <a:avLst/>
-          </a:prstGeom>
-          <a:noFill/>
-          <a:ln/>
-        </p:spPr>
-        <p:txBody>
-          <a:bodyPr wrap="square" lIns="0" tIns="0" rIns="0" bIns="0" rtlCol="0" anchor="ctr"/>
-          <a:lstStyle/>
-          <a:p>
-            <a:pPr marL="0" indent="0">
-              <a:buNone/>
-            </a:pPr>
-            <a:r>
-              <a:rPr lang="en-US" sz="1700" b="1" dirty="0">
-                <a:solidFill>
-                  <a:schemeClr val="accent5"/>
-                </a:solidFill>
-              </a:rPr>
-              <a:t>自己管理</a:t>
-            </a:r>
-            <a:endParaRPr lang="en-US" sz="1700" dirty="0"/>
-          </a:p>
-          <a:p>
-            <a:pPr marL="0" indent="0">
-              <a:buNone/>
-            </a:pPr>
-            <a:r>
-              <a:rPr lang="en-US" sz="1300" dirty="0">
-                <a:solidFill>
-                  <a:schemeClr val="accent5"/>
-                </a:solidFill>
-              </a:rPr>
-              <a:t>計画どおりに進めることを重視</a:t>
-            </a:r>
-            <a:endParaRPr lang="en-US" sz="1700" dirty="0"/>
-          </a:p>
-        </p:txBody>
-      </p:sp>
-      <p:pic>
-        <p:nvPicPr>
-          <p:cNvPr id="21" name="Image 3" descr="preencoded.png"/>
-          <p:cNvPicPr>
-            <a:picLocks noChangeAspect="1"/>
-          </p:cNvPicPr>
-          <p:nvPr/>
-        </p:nvPicPr>
-        <p:blipFill>
-          <a:blip r:embed="rId4"/>
-          <a:stretch>
-            <a:fillRect/>
-          </a:stretch>
-        </p:blipFill>
-        <p:spPr>
-          <a:xfrm>
-            <a:off x="3840480" y="4046220"/>
-            <a:ext cx="365760" cy="365760"/>
-          </a:xfrm>
-          <a:prstGeom prst="rect">
-            <a:avLst/>
-          </a:prstGeom>
-        </p:spPr>
-      </p:pic>
-      <p:sp>
-        <p:nvSpPr>
-          <p:cNvPr id="22" name="Shape 16"/>
-          <p:cNvSpPr/>
-          <p:nvPr/>
-        </p:nvSpPr>
-        <p:spPr>
-          <a:xfrm>
-            <a:off x="4480560" y="3703320"/>
-            <a:ext cx="3017520" cy="1051560"/>
-          </a:xfrm>
-          <a:prstGeom prst="roundRect">
-            <a:avLst>
-              <a:gd name="adj" fmla="val 6957"/>
-            </a:avLst>
-          </a:prstGeom>
-          <a:solidFill>
-            <a:schemeClr val="tx2"/>
-          </a:solidFill>
-          <a:ln/>
-        </p:spPr>
-        <p:txBody>
-          <a:bodyPr/>
-          <a:lstStyle/>
-          <a:p>
-            <a:endParaRPr lang="ja-JP" altLang="en-US"/>
-          </a:p>
-        </p:txBody>
-      </p:sp>
-      <p:sp>
-        <p:nvSpPr>
-          <p:cNvPr id="23" name="Text 17"/>
-          <p:cNvSpPr txBox="1"/>
-          <p:nvPr/>
-        </p:nvSpPr>
-        <p:spPr>
-          <a:xfrm>
-            <a:off x="4663440" y="3703320"/>
-            <a:ext cx="2651760" cy="1051560"/>
-          </a:xfrm>
-          <a:prstGeom prst="rect">
-            <a:avLst/>
-          </a:prstGeom>
-          <a:noFill/>
-          <a:ln/>
-        </p:spPr>
-        <p:txBody>
-          <a:bodyPr wrap="square" lIns="0" tIns="0" rIns="0" bIns="0" rtlCol="0" anchor="ctr"/>
-          <a:lstStyle/>
-          <a:p>
-            <a:pPr marL="0" indent="0">
-              <a:buNone/>
-            </a:pPr>
-            <a:r>
-              <a:rPr lang="en-US" sz="1700" b="1" dirty="0">
-                <a:solidFill>
-                  <a:schemeClr val="bg1"/>
-                </a:solidFill>
-              </a:rPr>
-              <a:t>自己調整</a:t>
-            </a:r>
-            <a:endParaRPr lang="en-US" sz="1700" dirty="0"/>
-          </a:p>
-          <a:p>
-            <a:pPr marL="0" indent="0">
-              <a:buNone/>
-            </a:pPr>
-            <a:r>
-              <a:rPr lang="en-US" sz="1300" dirty="0">
-                <a:solidFill>
-                  <a:schemeClr val="accent6"/>
-                </a:solidFill>
-              </a:rPr>
-              <a:t>計画を修正しながら学ぶ</a:t>
-            </a:r>
-            <a:endParaRPr lang="en-US" sz="1700" dirty="0"/>
-          </a:p>
-        </p:txBody>
-      </p:sp>
-      <p:sp>
-        <p:nvSpPr>
-          <p:cNvPr id="24" name="Text 18"/>
-          <p:cNvSpPr txBox="1"/>
-          <p:nvPr/>
-        </p:nvSpPr>
-        <p:spPr>
-          <a:xfrm>
-            <a:off x="548640" y="4983480"/>
-            <a:ext cx="6949440" cy="1005840"/>
-          </a:xfrm>
-          <a:prstGeom prst="rect">
-            <a:avLst/>
-          </a:prstGeom>
-          <a:noFill/>
-          <a:ln/>
-        </p:spPr>
-        <p:txBody>
-          <a:bodyPr wrap="square" lIns="0" tIns="0" rIns="0" bIns="0" rtlCol="0" anchor="t"/>
-          <a:lstStyle/>
-          <a:p>
-            <a:pPr marL="0" indent="0">
-              <a:buNone/>
-            </a:pPr>
-            <a:r>
-              <a:rPr lang="en-US" sz="1500" b="1" dirty="0" err="1">
-                <a:solidFill>
-                  <a:schemeClr val="accent2"/>
-                </a:solidFill>
-              </a:rPr>
-              <a:t>教育課程に位置付け</a:t>
-            </a:r>
-            <a:r>
-              <a:rPr lang="en-US" sz="1500" b="1" dirty="0">
-                <a:solidFill>
-                  <a:schemeClr val="accent2"/>
-                </a:solidFill>
-              </a:rPr>
-              <a:t>　</a:t>
-            </a:r>
-          </a:p>
-          <a:p>
-            <a:pPr marL="0" indent="0">
-              <a:buNone/>
-            </a:pPr>
-            <a:r>
-              <a:rPr lang="en-US" sz="1500" dirty="0" err="1">
-                <a:solidFill>
-                  <a:schemeClr val="tx1"/>
-                </a:solidFill>
-              </a:rPr>
-              <a:t>国語・算数・理科・社会などの単元計画に位置付け、学校全体のシステムとして計画的に実施</a:t>
-            </a:r>
-            <a:endParaRPr lang="en-US" sz="1500" dirty="0"/>
-          </a:p>
-        </p:txBody>
-      </p:sp>
-      <p:sp>
-        <p:nvSpPr>
-          <p:cNvPr id="25" name="Slide Number Placeholder 0"/>
-          <p:cNvSpPr>
-            <a:spLocks noGrp="1"/>
-          </p:cNvSpPr>
-          <p:nvPr>
-            <p:ph type="sldNum" sz="quarter" idx="4294967295"/>
-          </p:nvPr>
-        </p:nvSpPr>
-        <p:spPr>
-          <a:xfrm>
-            <a:off x="11185855" y="6419088"/>
-            <a:ext cx="457200" cy="274320"/>
-          </a:xfrm>
-          <a:prstGeom prst="rect">
-            <a:avLst/>
-          </a:prstGeom>
-          <a:extLst>
-            <a:ext uri="{C572A759-6A51-4108-AA02-DFA0A04FC94B}">
-              <ma14:wrappingTextBoxFlag xmlns:ma14="http://schemas.microsoft.com/office/mac/drawingml/2011/main" xmlns="" val="0"/>
-            </a:ext>
-          </a:extLst>
-        </p:spPr>
-        <p:txBody>
-          <a:bodyPr/>
-          <a:lstStyle>
-            <a:lvl1pPr>
-              <a:defRPr sz="1000">
-                <a:solidFill>
-                  <a:schemeClr val="accent5"/>
-                </a:solidFill>
-              </a:defRPr>
-            </a:lvl1pPr>
-          </a:lstStyle>
-          <a:p>
-            <a:pPr algn="r"/>
-            <a:fld id="{F7021451-1387-4CA6-816F-3879F97B5CBC}" type="slidenum">
-              <a:rPr lang="en-US" b="0"/>
-              <a:t>8</a:t>
-            </a:fld>
-            <a:endParaRPr lang="en-US"/>
-          </a:p>
-        </p:txBody>
-      </p:sp>
-      <p:pic>
-        <p:nvPicPr>
-          <p:cNvPr id="26" name="写真 IMG_0115.JPG" descr="IMG_0115.JPG"/>
-          <p:cNvPicPr>
-            <a:picLocks noChangeAspect="1"/>
-          </p:cNvPicPr>
-          <p:nvPr/>
-        </p:nvPicPr>
-        <p:blipFill>
-          <a:blip r:embed="rId8"/>
-          <a:srcRect l="40" r="40"/>
-          <a:stretch>
-            <a:fillRect/>
-          </a:stretch>
-        </p:blipFill>
-        <p:spPr>
-          <a:xfrm>
-            <a:off x="7863840" y="1508760"/>
-            <a:ext cx="3776472" cy="2834640"/>
-          </a:xfrm>
-          <a:prstGeom prst="rect">
-            <a:avLst/>
-          </a:prstGeom>
-        </p:spPr>
-      </p:pic>
-      <p:pic>
-        <p:nvPicPr>
-          <p:cNvPr id="27" name="写真 IMG_0257.JPG" descr="IMG_0257.JPG"/>
-          <p:cNvPicPr>
-            <a:picLocks noChangeAspect="1"/>
-          </p:cNvPicPr>
-          <p:nvPr/>
-        </p:nvPicPr>
-        <p:blipFill>
-          <a:blip r:embed="rId9"/>
-          <a:srcRect r="14714"/>
-          <a:stretch>
-            <a:fillRect/>
-          </a:stretch>
-        </p:blipFill>
-        <p:spPr>
-          <a:xfrm>
-            <a:off x="7863840" y="4480560"/>
-            <a:ext cx="1819656" cy="1600200"/>
-          </a:xfrm>
-          <a:prstGeom prst="rect">
-            <a:avLst/>
-          </a:prstGeom>
-        </p:spPr>
-      </p:pic>
-      <p:pic>
-        <p:nvPicPr>
-          <p:cNvPr id="28" name="写真 IMG_0243.JPG" descr="image.JPG"/>
-          <p:cNvPicPr>
-            <a:picLocks noChangeAspect="1"/>
-          </p:cNvPicPr>
-          <p:nvPr/>
-        </p:nvPicPr>
-        <p:blipFill>
-          <a:blip r:embed="rId6"/>
-          <a:srcRect l="7357" r="7357"/>
-          <a:stretch>
-            <a:fillRect/>
-          </a:stretch>
-        </p:blipFill>
-        <p:spPr>
-          <a:xfrm>
-            <a:off x="9820656" y="4480560"/>
-            <a:ext cx="1819656" cy="1600200"/>
+            <a:off x="5273039" y="3931920"/>
+            <a:ext cx="2225040" cy="2148840"/>
           </a:xfrm>
           <a:prstGeom prst="rect">
             <a:avLst/>
